--- a/assets/engineering/pacemaker/Figures.pptx
+++ b/assets/engineering/pacemaker/Figures.pptx
@@ -5,16 +5,17 @@
     <p:sldMasterId id="2147483648" r:id="rId1"/>
   </p:sldMasterIdLst>
   <p:notesMasterIdLst>
-    <p:notesMasterId r:id="rId9"/>
+    <p:notesMasterId r:id="rId10"/>
   </p:notesMasterIdLst>
   <p:sldIdLst>
     <p:sldId id="272" r:id="rId2"/>
-    <p:sldId id="273" r:id="rId3"/>
-    <p:sldId id="274" r:id="rId4"/>
-    <p:sldId id="275" r:id="rId5"/>
-    <p:sldId id="277" r:id="rId6"/>
-    <p:sldId id="278" r:id="rId7"/>
-    <p:sldId id="276" r:id="rId8"/>
+    <p:sldId id="279" r:id="rId3"/>
+    <p:sldId id="273" r:id="rId4"/>
+    <p:sldId id="274" r:id="rId5"/>
+    <p:sldId id="275" r:id="rId6"/>
+    <p:sldId id="277" r:id="rId7"/>
+    <p:sldId id="278" r:id="rId8"/>
+    <p:sldId id="276" r:id="rId9"/>
   </p:sldIdLst>
   <p:sldSz cx="12192000" cy="6858000"/>
   <p:notesSz cx="6858000" cy="9144000"/>
@@ -203,7 +204,7 @@
           <a:p>
             <a:fld id="{E95A235F-D1D8-3547-B94E-9D31DDC8194E}" type="datetimeFigureOut">
               <a:rPr lang="en-US" smtClean="0"/>
-              <a:t>5/9/26</a:t>
+              <a:t>7/12/26</a:t>
             </a:fld>
             <a:endParaRPr lang="en-US"/>
           </a:p>
@@ -578,6 +579,114 @@
 </p:notes>
 </file>
 
+<file path=ppt/notesSlides/notesSlide2.xml><?xml version="1.0" encoding="utf-8"?>
+<p:notes xmlns:a="http://schemas.openxmlformats.org/drawingml/2006/main" xmlns:r="http://schemas.openxmlformats.org/officeDocument/2006/relationships" xmlns:p="http://schemas.openxmlformats.org/presentationml/2006/main">
+  <p:cSld>
+    <p:spTree>
+      <p:nvGrpSpPr>
+        <p:cNvPr id="1" name="">
+          <a:extLst>
+            <a:ext uri="{FF2B5EF4-FFF2-40B4-BE49-F238E27FC236}">
+              <a16:creationId xmlns:a16="http://schemas.microsoft.com/office/drawing/2014/main" id="{351F5268-F7E1-096A-2D26-63B563B2D854}"/>
+            </a:ext>
+          </a:extLst>
+        </p:cNvPr>
+        <p:cNvGrpSpPr/>
+        <p:nvPr/>
+      </p:nvGrpSpPr>
+      <p:grpSpPr>
+        <a:xfrm>
+          <a:off x="0" y="0"/>
+          <a:ext cx="0" cy="0"/>
+          <a:chOff x="0" y="0"/>
+          <a:chExt cx="0" cy="0"/>
+        </a:xfrm>
+      </p:grpSpPr>
+      <p:sp>
+        <p:nvSpPr>
+          <p:cNvPr id="2" name="Slide Image Placeholder 1">
+            <a:extLst>
+              <a:ext uri="{FF2B5EF4-FFF2-40B4-BE49-F238E27FC236}">
+                <a16:creationId xmlns:a16="http://schemas.microsoft.com/office/drawing/2014/main" id="{44DEB1E2-E477-DC26-5C7F-B9379F618DAC}"/>
+              </a:ext>
+            </a:extLst>
+          </p:cNvPr>
+          <p:cNvSpPr>
+            <a:spLocks noGrp="1" noRot="1" noChangeAspect="1"/>
+          </p:cNvSpPr>
+          <p:nvPr>
+            <p:ph type="sldImg"/>
+          </p:nvPr>
+        </p:nvSpPr>
+        <p:spPr/>
+      </p:sp>
+      <p:sp>
+        <p:nvSpPr>
+          <p:cNvPr id="3" name="Notes Placeholder 2">
+            <a:extLst>
+              <a:ext uri="{FF2B5EF4-FFF2-40B4-BE49-F238E27FC236}">
+                <a16:creationId xmlns:a16="http://schemas.microsoft.com/office/drawing/2014/main" id="{0581C0F8-232E-1867-908D-95929FF44358}"/>
+              </a:ext>
+            </a:extLst>
+          </p:cNvPr>
+          <p:cNvSpPr>
+            <a:spLocks noGrp="1"/>
+          </p:cNvSpPr>
+          <p:nvPr>
+            <p:ph type="body" idx="1"/>
+          </p:nvPr>
+        </p:nvSpPr>
+        <p:spPr/>
+        <p:txBody>
+          <a:bodyPr/>
+          <a:lstStyle/>
+          <a:p>
+            <a:endParaRPr lang="en-US" dirty="0"/>
+          </a:p>
+        </p:txBody>
+      </p:sp>
+      <p:sp>
+        <p:nvSpPr>
+          <p:cNvPr id="4" name="Slide Number Placeholder 3">
+            <a:extLst>
+              <a:ext uri="{FF2B5EF4-FFF2-40B4-BE49-F238E27FC236}">
+                <a16:creationId xmlns:a16="http://schemas.microsoft.com/office/drawing/2014/main" id="{F2D98437-C3FE-3AA8-65A0-AE95FF5A882A}"/>
+              </a:ext>
+            </a:extLst>
+          </p:cNvPr>
+          <p:cNvSpPr>
+            <a:spLocks noGrp="1"/>
+          </p:cNvSpPr>
+          <p:nvPr>
+            <p:ph type="sldNum" sz="quarter" idx="5"/>
+          </p:nvPr>
+        </p:nvSpPr>
+        <p:spPr/>
+        <p:txBody>
+          <a:bodyPr/>
+          <a:lstStyle/>
+          <a:p>
+            <a:fld id="{B9C74887-B1B6-5447-BE42-E7A05222691B}" type="slidenum">
+              <a:rPr lang="en-US" smtClean="0"/>
+              <a:t>2</a:t>
+            </a:fld>
+            <a:endParaRPr lang="en-US"/>
+          </a:p>
+        </p:txBody>
+      </p:sp>
+    </p:spTree>
+    <p:extLst>
+      <p:ext uri="{BB962C8B-B14F-4D97-AF65-F5344CB8AC3E}">
+        <p14:creationId xmlns:p14="http://schemas.microsoft.com/office/powerpoint/2010/main" val="1305245291"/>
+      </p:ext>
+    </p:extLst>
+  </p:cSld>
+  <p:clrMapOvr>
+    <a:masterClrMapping/>
+  </p:clrMapOvr>
+</p:notes>
+</file>
+
 <file path=ppt/slideLayouts/slideLayout1.xml><?xml version="1.0" encoding="utf-8"?>
 <p:sldLayout xmlns:a="http://schemas.openxmlformats.org/drawingml/2006/main" xmlns:r="http://schemas.openxmlformats.org/officeDocument/2006/relationships" xmlns:p="http://schemas.openxmlformats.org/presentationml/2006/main" type="title" preserve="1">
   <p:cSld name="Title Slide">
@@ -725,7 +834,7 @@
           <a:p>
             <a:fld id="{6F5E2787-809E-9049-9C6F-D5528A76A6DA}" type="datetimeFigureOut">
               <a:rPr lang="en-US" smtClean="0"/>
-              <a:t>5/9/26</a:t>
+              <a:t>7/12/26</a:t>
             </a:fld>
             <a:endParaRPr lang="en-US"/>
           </a:p>
@@ -923,7 +1032,7 @@
           <a:p>
             <a:fld id="{6F5E2787-809E-9049-9C6F-D5528A76A6DA}" type="datetimeFigureOut">
               <a:rPr lang="en-US" smtClean="0"/>
-              <a:t>5/9/26</a:t>
+              <a:t>7/12/26</a:t>
             </a:fld>
             <a:endParaRPr lang="en-US"/>
           </a:p>
@@ -1131,7 +1240,7 @@
           <a:p>
             <a:fld id="{6F5E2787-809E-9049-9C6F-D5528A76A6DA}" type="datetimeFigureOut">
               <a:rPr lang="en-US" smtClean="0"/>
-              <a:t>5/9/26</a:t>
+              <a:t>7/12/26</a:t>
             </a:fld>
             <a:endParaRPr lang="en-US"/>
           </a:p>
@@ -1329,7 +1438,7 @@
           <a:p>
             <a:fld id="{6F5E2787-809E-9049-9C6F-D5528A76A6DA}" type="datetimeFigureOut">
               <a:rPr lang="en-US" smtClean="0"/>
-              <a:t>5/9/26</a:t>
+              <a:t>7/12/26</a:t>
             </a:fld>
             <a:endParaRPr lang="en-US"/>
           </a:p>
@@ -1604,7 +1713,7 @@
           <a:p>
             <a:fld id="{6F5E2787-809E-9049-9C6F-D5528A76A6DA}" type="datetimeFigureOut">
               <a:rPr lang="en-US" smtClean="0"/>
-              <a:t>5/9/26</a:t>
+              <a:t>7/12/26</a:t>
             </a:fld>
             <a:endParaRPr lang="en-US"/>
           </a:p>
@@ -1869,7 +1978,7 @@
           <a:p>
             <a:fld id="{6F5E2787-809E-9049-9C6F-D5528A76A6DA}" type="datetimeFigureOut">
               <a:rPr lang="en-US" smtClean="0"/>
-              <a:t>5/9/26</a:t>
+              <a:t>7/12/26</a:t>
             </a:fld>
             <a:endParaRPr lang="en-US"/>
           </a:p>
@@ -2281,7 +2390,7 @@
           <a:p>
             <a:fld id="{6F5E2787-809E-9049-9C6F-D5528A76A6DA}" type="datetimeFigureOut">
               <a:rPr lang="en-US" smtClean="0"/>
-              <a:t>5/9/26</a:t>
+              <a:t>7/12/26</a:t>
             </a:fld>
             <a:endParaRPr lang="en-US"/>
           </a:p>
@@ -2422,7 +2531,7 @@
           <a:p>
             <a:fld id="{6F5E2787-809E-9049-9C6F-D5528A76A6DA}" type="datetimeFigureOut">
               <a:rPr lang="en-US" smtClean="0"/>
-              <a:t>5/9/26</a:t>
+              <a:t>7/12/26</a:t>
             </a:fld>
             <a:endParaRPr lang="en-US"/>
           </a:p>
@@ -2535,7 +2644,7 @@
           <a:p>
             <a:fld id="{6F5E2787-809E-9049-9C6F-D5528A76A6DA}" type="datetimeFigureOut">
               <a:rPr lang="en-US" smtClean="0"/>
-              <a:t>5/9/26</a:t>
+              <a:t>7/12/26</a:t>
             </a:fld>
             <a:endParaRPr lang="en-US"/>
           </a:p>
@@ -2846,7 +2955,7 @@
           <a:p>
             <a:fld id="{6F5E2787-809E-9049-9C6F-D5528A76A6DA}" type="datetimeFigureOut">
               <a:rPr lang="en-US" smtClean="0"/>
-              <a:t>5/9/26</a:t>
+              <a:t>7/12/26</a:t>
             </a:fld>
             <a:endParaRPr lang="en-US"/>
           </a:p>
@@ -3134,7 +3243,7 @@
           <a:p>
             <a:fld id="{6F5E2787-809E-9049-9C6F-D5528A76A6DA}" type="datetimeFigureOut">
               <a:rPr lang="en-US" smtClean="0"/>
-              <a:t>5/9/26</a:t>
+              <a:t>7/12/26</a:t>
             </a:fld>
             <a:endParaRPr lang="en-US"/>
           </a:p>
@@ -3375,7 +3484,7 @@
           <a:p>
             <a:fld id="{6F5E2787-809E-9049-9C6F-D5528A76A6DA}" type="datetimeFigureOut">
               <a:rPr lang="en-US" smtClean="0"/>
-              <a:t>5/9/26</a:t>
+              <a:t>7/12/26</a:t>
             </a:fld>
             <a:endParaRPr lang="en-US"/>
           </a:p>
@@ -5560,9 +5669,23 @@
 <file path=ppt/slides/slide2.xml><?xml version="1.0" encoding="utf-8"?>
 <p:sld xmlns:a="http://schemas.openxmlformats.org/drawingml/2006/main" xmlns:r="http://schemas.openxmlformats.org/officeDocument/2006/relationships" xmlns:p="http://schemas.openxmlformats.org/presentationml/2006/main">
   <p:cSld>
+    <p:bg>
+      <p:bgPr>
+        <a:solidFill>
+          <a:srgbClr val="141820"/>
+        </a:solidFill>
+        <a:effectLst/>
+      </p:bgPr>
+    </p:bg>
     <p:spTree>
       <p:nvGrpSpPr>
-        <p:cNvPr id="1" name=""/>
+        <p:cNvPr id="1" name="">
+          <a:extLst>
+            <a:ext uri="{FF2B5EF4-FFF2-40B4-BE49-F238E27FC236}">
+              <a16:creationId xmlns:a16="http://schemas.microsoft.com/office/drawing/2014/main" id="{CD84731B-4311-4DFD-04D0-92A2F4BF9C63}"/>
+            </a:ext>
+          </a:extLst>
+        </p:cNvPr>
         <p:cNvGrpSpPr/>
         <p:nvPr/>
       </p:nvGrpSpPr>
@@ -5576,30 +5699,33 @@
       </p:grpSpPr>
       <p:sp>
         <p:nvSpPr>
-          <p:cNvPr id="8" name="Rectangle 7">
-            <a:extLst>
-              <a:ext uri="{FF2B5EF4-FFF2-40B4-BE49-F238E27FC236}">
-                <a16:creationId xmlns:a16="http://schemas.microsoft.com/office/drawing/2014/main" id="{94443883-7FCD-FA23-D7B0-EA3AFACE1C6A}"/>
-              </a:ext>
-            </a:extLst>
-          </p:cNvPr>
-          <p:cNvSpPr>
-            <a:spLocks noChangeAspect="1"/>
-          </p:cNvSpPr>
+          <p:cNvPr id="4" name="Rectangle 3">
+            <a:extLst>
+              <a:ext uri="{FF2B5EF4-FFF2-40B4-BE49-F238E27FC236}">
+                <a16:creationId xmlns:a16="http://schemas.microsoft.com/office/drawing/2014/main" id="{787DEB63-200C-F42C-D4AA-0ABD37611C98}"/>
+              </a:ext>
+            </a:extLst>
+          </p:cNvPr>
+          <p:cNvSpPr/>
           <p:nvPr/>
         </p:nvSpPr>
         <p:spPr>
           <a:xfrm>
-            <a:off x="756742" y="691977"/>
-            <a:ext cx="10696763" cy="4108151"/>
+            <a:off x="1633048" y="1043435"/>
+            <a:ext cx="1926655" cy="871060"/>
           </a:xfrm>
           <a:prstGeom prst="rect">
             <a:avLst/>
           </a:prstGeom>
-          <a:noFill/>
+          <a:solidFill>
+            <a:srgbClr val="D1CADB"/>
+          </a:solidFill>
           <a:ln>
             <a:solidFill>
-              <a:schemeClr val="tx1"/>
+              <a:schemeClr val="tx1">
+                <a:lumMod val="50000"/>
+                <a:lumOff val="50000"/>
+              </a:schemeClr>
             </a:solidFill>
           </a:ln>
         </p:spPr>
@@ -5624,51 +5750,1749 @@
           <a:lstStyle/>
           <a:p>
             <a:pPr algn="ctr"/>
-            <a:endParaRPr lang="en-US" dirty="0"/>
-          </a:p>
-        </p:txBody>
-      </p:sp>
-      <p:pic>
-        <p:nvPicPr>
-          <p:cNvPr id="10" name="Graphic 9">
-            <a:extLst>
-              <a:ext uri="{FF2B5EF4-FFF2-40B4-BE49-F238E27FC236}">
-                <a16:creationId xmlns:a16="http://schemas.microsoft.com/office/drawing/2014/main" id="{2D6AA379-9F7A-0BEC-3BB6-F855FED3454F}"/>
-              </a:ext>
-            </a:extLst>
-          </p:cNvPr>
-          <p:cNvPicPr>
-            <a:picLocks noChangeAspect="1"/>
-          </p:cNvPicPr>
+            <a:r>
+              <a:rPr lang="en-US" sz="1600" b="1" dirty="0">
+                <a:solidFill>
+                  <a:schemeClr val="tx1">
+                    <a:lumMod val="75000"/>
+                    <a:lumOff val="25000"/>
+                  </a:schemeClr>
+                </a:solidFill>
+                <a:latin typeface="Arial Black" panose="020B0604020202020204" pitchFamily="34" charset="0"/>
+                <a:cs typeface="Arial Black" panose="020B0604020202020204" pitchFamily="34" charset="0"/>
+              </a:rPr>
+              <a:t>Differential Amplifier</a:t>
+            </a:r>
+            <a:endParaRPr lang="en-US" sz="1600" i="1" dirty="0">
+              <a:solidFill>
+                <a:schemeClr val="tx1">
+                  <a:lumMod val="75000"/>
+                  <a:lumOff val="25000"/>
+                </a:schemeClr>
+              </a:solidFill>
+              <a:latin typeface="Arial Black" panose="020B0604020202020204" pitchFamily="34" charset="0"/>
+              <a:cs typeface="Arial Black" panose="020B0604020202020204" pitchFamily="34" charset="0"/>
+            </a:endParaRPr>
+          </a:p>
+        </p:txBody>
+      </p:sp>
+      <p:sp>
+        <p:nvSpPr>
+          <p:cNvPr id="6" name="Rectangle 5">
+            <a:extLst>
+              <a:ext uri="{FF2B5EF4-FFF2-40B4-BE49-F238E27FC236}">
+                <a16:creationId xmlns:a16="http://schemas.microsoft.com/office/drawing/2014/main" id="{E947805B-54EE-E1C0-1145-707F9EAAF3AE}"/>
+              </a:ext>
+            </a:extLst>
+          </p:cNvPr>
+          <p:cNvSpPr/>
           <p:nvPr/>
-        </p:nvPicPr>
-        <p:blipFill>
-          <a:blip>
-            <a:extLst>
-              <a:ext uri="{96DAC541-7B7A-43D3-8B79-37D633B846F1}">
-                <asvg:svgBlip xmlns:asvg="http://schemas.microsoft.com/office/drawing/2016/SVG/main" r:embed="rId2"/>
-              </a:ext>
-            </a:extLst>
-          </a:blip>
-          <a:srcRect l="17069" t="10349" r="20768" b="64903"/>
-          <a:stretch>
-            <a:fillRect/>
-          </a:stretch>
-        </p:blipFill>
-        <p:spPr>
-          <a:xfrm>
-            <a:off x="756742" y="1359242"/>
-            <a:ext cx="10673211" cy="3002693"/>
+        </p:nvSpPr>
+        <p:spPr>
+          <a:xfrm>
+            <a:off x="4371586" y="1127074"/>
+            <a:ext cx="1436546" cy="709137"/>
           </a:xfrm>
           <a:prstGeom prst="rect">
             <a:avLst/>
           </a:prstGeom>
-        </p:spPr>
-      </p:pic>
+          <a:solidFill>
+            <a:srgbClr val="D1CADB"/>
+          </a:solidFill>
+          <a:ln>
+            <a:solidFill>
+              <a:schemeClr val="tx1">
+                <a:lumMod val="50000"/>
+                <a:lumOff val="50000"/>
+              </a:schemeClr>
+            </a:solidFill>
+          </a:ln>
+        </p:spPr>
+        <p:style>
+          <a:lnRef idx="2">
+            <a:schemeClr val="accent1">
+              <a:shade val="15000"/>
+            </a:schemeClr>
+          </a:lnRef>
+          <a:fillRef idx="1">
+            <a:schemeClr val="accent1"/>
+          </a:fillRef>
+          <a:effectRef idx="0">
+            <a:schemeClr val="accent1"/>
+          </a:effectRef>
+          <a:fontRef idx="minor">
+            <a:schemeClr val="lt1"/>
+          </a:fontRef>
+        </p:style>
+        <p:txBody>
+          <a:bodyPr rtlCol="0" anchor="ctr"/>
+          <a:lstStyle/>
+          <a:p>
+            <a:pPr algn="ctr"/>
+            <a:r>
+              <a:rPr lang="en-US" sz="1600" b="1" dirty="0">
+                <a:solidFill>
+                  <a:schemeClr val="tx1">
+                    <a:lumMod val="75000"/>
+                    <a:lumOff val="25000"/>
+                  </a:schemeClr>
+                </a:solidFill>
+                <a:latin typeface="Arial Black" panose="020B0604020202020204" pitchFamily="34" charset="0"/>
+                <a:cs typeface="Arial Black" panose="020B0604020202020204" pitchFamily="34" charset="0"/>
+              </a:rPr>
+              <a:t>RC High-Pass Filter</a:t>
+            </a:r>
+            <a:endParaRPr lang="en-US" sz="1600" i="1" dirty="0">
+              <a:solidFill>
+                <a:schemeClr val="tx1">
+                  <a:lumMod val="75000"/>
+                  <a:lumOff val="25000"/>
+                </a:schemeClr>
+              </a:solidFill>
+              <a:latin typeface="Arial Black" panose="020B0604020202020204" pitchFamily="34" charset="0"/>
+              <a:cs typeface="Arial Black" panose="020B0604020202020204" pitchFamily="34" charset="0"/>
+            </a:endParaRPr>
+          </a:p>
+        </p:txBody>
+      </p:sp>
+      <p:sp>
+        <p:nvSpPr>
+          <p:cNvPr id="7" name="Rectangle 6">
+            <a:extLst>
+              <a:ext uri="{FF2B5EF4-FFF2-40B4-BE49-F238E27FC236}">
+                <a16:creationId xmlns:a16="http://schemas.microsoft.com/office/drawing/2014/main" id="{1256772F-2E68-CFCB-51E1-02E585791071}"/>
+              </a:ext>
+            </a:extLst>
+          </p:cNvPr>
+          <p:cNvSpPr/>
+          <p:nvPr/>
+        </p:nvSpPr>
+        <p:spPr>
+          <a:xfrm>
+            <a:off x="6265332" y="1127074"/>
+            <a:ext cx="1436546" cy="709137"/>
+          </a:xfrm>
+          <a:prstGeom prst="rect">
+            <a:avLst/>
+          </a:prstGeom>
+          <a:solidFill>
+            <a:srgbClr val="D1CADB"/>
+          </a:solidFill>
+          <a:ln>
+            <a:solidFill>
+              <a:schemeClr val="tx1">
+                <a:lumMod val="50000"/>
+                <a:lumOff val="50000"/>
+              </a:schemeClr>
+            </a:solidFill>
+          </a:ln>
+        </p:spPr>
+        <p:style>
+          <a:lnRef idx="2">
+            <a:schemeClr val="accent1">
+              <a:shade val="15000"/>
+            </a:schemeClr>
+          </a:lnRef>
+          <a:fillRef idx="1">
+            <a:schemeClr val="accent1"/>
+          </a:fillRef>
+          <a:effectRef idx="0">
+            <a:schemeClr val="accent1"/>
+          </a:effectRef>
+          <a:fontRef idx="minor">
+            <a:schemeClr val="lt1"/>
+          </a:fontRef>
+        </p:style>
+        <p:txBody>
+          <a:bodyPr rtlCol="0" anchor="ctr"/>
+          <a:lstStyle/>
+          <a:p>
+            <a:pPr algn="ctr"/>
+            <a:r>
+              <a:rPr lang="en-US" sz="1600" b="1" dirty="0">
+                <a:solidFill>
+                  <a:schemeClr val="tx1">
+                    <a:lumMod val="75000"/>
+                    <a:lumOff val="25000"/>
+                  </a:schemeClr>
+                </a:solidFill>
+                <a:latin typeface="Arial Black" panose="020B0604020202020204" pitchFamily="34" charset="0"/>
+                <a:cs typeface="Arial Black" panose="020B0604020202020204" pitchFamily="34" charset="0"/>
+              </a:rPr>
+              <a:t>RC Low-Pass Filter</a:t>
+            </a:r>
+            <a:endParaRPr lang="en-US" sz="1600" i="1" dirty="0">
+              <a:solidFill>
+                <a:schemeClr val="tx1">
+                  <a:lumMod val="75000"/>
+                  <a:lumOff val="25000"/>
+                </a:schemeClr>
+              </a:solidFill>
+              <a:latin typeface="Arial Black" panose="020B0604020202020204" pitchFamily="34" charset="0"/>
+              <a:cs typeface="Arial Black" panose="020B0604020202020204" pitchFamily="34" charset="0"/>
+            </a:endParaRPr>
+          </a:p>
+        </p:txBody>
+      </p:sp>
+      <p:sp>
+        <p:nvSpPr>
+          <p:cNvPr id="9" name="Rectangle 8">
+            <a:extLst>
+              <a:ext uri="{FF2B5EF4-FFF2-40B4-BE49-F238E27FC236}">
+                <a16:creationId xmlns:a16="http://schemas.microsoft.com/office/drawing/2014/main" id="{EF2DA18C-E309-558A-4368-73A5980A7028}"/>
+              </a:ext>
+            </a:extLst>
+          </p:cNvPr>
+          <p:cNvSpPr/>
+          <p:nvPr/>
+        </p:nvSpPr>
+        <p:spPr>
+          <a:xfrm>
+            <a:off x="8159078" y="1123368"/>
+            <a:ext cx="1436546" cy="709137"/>
+          </a:xfrm>
+          <a:prstGeom prst="rect">
+            <a:avLst/>
+          </a:prstGeom>
+          <a:solidFill>
+            <a:srgbClr val="D1CADB"/>
+          </a:solidFill>
+          <a:ln>
+            <a:solidFill>
+              <a:schemeClr val="tx1">
+                <a:lumMod val="50000"/>
+                <a:lumOff val="50000"/>
+              </a:schemeClr>
+            </a:solidFill>
+          </a:ln>
+        </p:spPr>
+        <p:style>
+          <a:lnRef idx="2">
+            <a:schemeClr val="accent1">
+              <a:shade val="15000"/>
+            </a:schemeClr>
+          </a:lnRef>
+          <a:fillRef idx="1">
+            <a:schemeClr val="accent1"/>
+          </a:fillRef>
+          <a:effectRef idx="0">
+            <a:schemeClr val="accent1"/>
+          </a:effectRef>
+          <a:fontRef idx="minor">
+            <a:schemeClr val="lt1"/>
+          </a:fontRef>
+        </p:style>
+        <p:txBody>
+          <a:bodyPr rtlCol="0" anchor="ctr"/>
+          <a:lstStyle/>
+          <a:p>
+            <a:pPr algn="ctr"/>
+            <a:r>
+              <a:rPr lang="en-US" sz="1600" b="1" dirty="0">
+                <a:solidFill>
+                  <a:schemeClr val="tx1">
+                    <a:lumMod val="75000"/>
+                    <a:lumOff val="25000"/>
+                  </a:schemeClr>
+                </a:solidFill>
+                <a:latin typeface="Arial Black" panose="020B0604020202020204" pitchFamily="34" charset="0"/>
+                <a:cs typeface="Arial Black" panose="020B0604020202020204" pitchFamily="34" charset="0"/>
+              </a:rPr>
+              <a:t>Active Gain</a:t>
+            </a:r>
+            <a:endParaRPr lang="en-US" sz="1600" i="1" dirty="0">
+              <a:solidFill>
+                <a:schemeClr val="tx1">
+                  <a:lumMod val="75000"/>
+                  <a:lumOff val="25000"/>
+                </a:schemeClr>
+              </a:solidFill>
+              <a:latin typeface="Arial Black" panose="020B0604020202020204" pitchFamily="34" charset="0"/>
+              <a:cs typeface="Arial Black" panose="020B0604020202020204" pitchFamily="34" charset="0"/>
+            </a:endParaRPr>
+          </a:p>
+        </p:txBody>
+      </p:sp>
+      <p:sp>
+        <p:nvSpPr>
+          <p:cNvPr id="11" name="Rectangle 10">
+            <a:extLst>
+              <a:ext uri="{FF2B5EF4-FFF2-40B4-BE49-F238E27FC236}">
+                <a16:creationId xmlns:a16="http://schemas.microsoft.com/office/drawing/2014/main" id="{445127F2-B41A-9D23-DCC6-FC8C46DDD4C3}"/>
+              </a:ext>
+            </a:extLst>
+          </p:cNvPr>
+          <p:cNvSpPr/>
+          <p:nvPr/>
+        </p:nvSpPr>
+        <p:spPr>
+          <a:xfrm>
+            <a:off x="10052824" y="1123368"/>
+            <a:ext cx="1574800" cy="709137"/>
+          </a:xfrm>
+          <a:prstGeom prst="rect">
+            <a:avLst/>
+          </a:prstGeom>
+          <a:solidFill>
+            <a:srgbClr val="D1CADB"/>
+          </a:solidFill>
+          <a:ln>
+            <a:solidFill>
+              <a:schemeClr val="tx1">
+                <a:lumMod val="50000"/>
+                <a:lumOff val="50000"/>
+              </a:schemeClr>
+            </a:solidFill>
+          </a:ln>
+        </p:spPr>
+        <p:style>
+          <a:lnRef idx="2">
+            <a:schemeClr val="accent1">
+              <a:shade val="15000"/>
+            </a:schemeClr>
+          </a:lnRef>
+          <a:fillRef idx="1">
+            <a:schemeClr val="accent1"/>
+          </a:fillRef>
+          <a:effectRef idx="0">
+            <a:schemeClr val="accent1"/>
+          </a:effectRef>
+          <a:fontRef idx="minor">
+            <a:schemeClr val="lt1"/>
+          </a:fontRef>
+        </p:style>
+        <p:txBody>
+          <a:bodyPr rtlCol="0" anchor="ctr"/>
+          <a:lstStyle/>
+          <a:p>
+            <a:pPr algn="ctr"/>
+            <a:r>
+              <a:rPr lang="en-US" sz="1600" b="1" dirty="0">
+                <a:solidFill>
+                  <a:schemeClr val="tx1">
+                    <a:lumMod val="75000"/>
+                    <a:lumOff val="25000"/>
+                  </a:schemeClr>
+                </a:solidFill>
+                <a:latin typeface="Arial Black" panose="020B0604020202020204" pitchFamily="34" charset="0"/>
+                <a:cs typeface="Arial Black" panose="020B0604020202020204" pitchFamily="34" charset="0"/>
+              </a:rPr>
+              <a:t>Comparator</a:t>
+            </a:r>
+            <a:endParaRPr lang="en-US" sz="1600" i="1" dirty="0">
+              <a:solidFill>
+                <a:schemeClr val="tx1">
+                  <a:lumMod val="75000"/>
+                  <a:lumOff val="25000"/>
+                </a:schemeClr>
+              </a:solidFill>
+              <a:latin typeface="Arial Black" panose="020B0604020202020204" pitchFamily="34" charset="0"/>
+              <a:cs typeface="Arial Black" panose="020B0604020202020204" pitchFamily="34" charset="0"/>
+            </a:endParaRPr>
+          </a:p>
+        </p:txBody>
+      </p:sp>
+      <p:sp>
+        <p:nvSpPr>
+          <p:cNvPr id="12" name="Rectangle 11">
+            <a:extLst>
+              <a:ext uri="{FF2B5EF4-FFF2-40B4-BE49-F238E27FC236}">
+                <a16:creationId xmlns:a16="http://schemas.microsoft.com/office/drawing/2014/main" id="{3D412011-F43D-08C0-E835-D9C63370C780}"/>
+              </a:ext>
+            </a:extLst>
+          </p:cNvPr>
+          <p:cNvSpPr/>
+          <p:nvPr/>
+        </p:nvSpPr>
+        <p:spPr>
+          <a:xfrm>
+            <a:off x="6891866" y="2743201"/>
+            <a:ext cx="4735758" cy="1834887"/>
+          </a:xfrm>
+          <a:prstGeom prst="rect">
+            <a:avLst/>
+          </a:prstGeom>
+          <a:solidFill>
+            <a:schemeClr val="bg1">
+              <a:lumMod val="85000"/>
+            </a:schemeClr>
+          </a:solidFill>
+          <a:ln>
+            <a:solidFill>
+              <a:schemeClr val="tx1">
+                <a:lumMod val="50000"/>
+                <a:lumOff val="50000"/>
+              </a:schemeClr>
+            </a:solidFill>
+          </a:ln>
+        </p:spPr>
+        <p:style>
+          <a:lnRef idx="2">
+            <a:schemeClr val="accent1">
+              <a:shade val="15000"/>
+            </a:schemeClr>
+          </a:lnRef>
+          <a:fillRef idx="1">
+            <a:schemeClr val="accent1"/>
+          </a:fillRef>
+          <a:effectRef idx="0">
+            <a:schemeClr val="accent1"/>
+          </a:effectRef>
+          <a:fontRef idx="minor">
+            <a:schemeClr val="lt1"/>
+          </a:fontRef>
+        </p:style>
+        <p:txBody>
+          <a:bodyPr rtlCol="0" anchor="ctr"/>
+          <a:lstStyle/>
+          <a:p>
+            <a:pPr algn="ctr"/>
+            <a:r>
+              <a:rPr lang="en-US" sz="2400" b="1" dirty="0">
+                <a:solidFill>
+                  <a:schemeClr val="tx1">
+                    <a:lumMod val="75000"/>
+                    <a:lumOff val="25000"/>
+                  </a:schemeClr>
+                </a:solidFill>
+                <a:latin typeface="Arial Black" panose="020B0604020202020204" pitchFamily="34" charset="0"/>
+                <a:cs typeface="Arial Black" panose="020B0604020202020204" pitchFamily="34" charset="0"/>
+              </a:rPr>
+              <a:t>Arduino</a:t>
+            </a:r>
+            <a:endParaRPr lang="en-US" sz="3200" i="1" dirty="0">
+              <a:solidFill>
+                <a:schemeClr val="tx1">
+                  <a:lumMod val="75000"/>
+                  <a:lumOff val="25000"/>
+                </a:schemeClr>
+              </a:solidFill>
+              <a:latin typeface="Arial Black" panose="020B0604020202020204" pitchFamily="34" charset="0"/>
+              <a:cs typeface="Arial Black" panose="020B0604020202020204" pitchFamily="34" charset="0"/>
+            </a:endParaRPr>
+          </a:p>
+        </p:txBody>
+      </p:sp>
+      <p:sp>
+        <p:nvSpPr>
+          <p:cNvPr id="13" name="Rectangle 12">
+            <a:extLst>
+              <a:ext uri="{FF2B5EF4-FFF2-40B4-BE49-F238E27FC236}">
+                <a16:creationId xmlns:a16="http://schemas.microsoft.com/office/drawing/2014/main" id="{90B1F131-EC10-BE6D-D32A-740B8BAB0664}"/>
+              </a:ext>
+            </a:extLst>
+          </p:cNvPr>
+          <p:cNvSpPr/>
+          <p:nvPr/>
+        </p:nvSpPr>
+        <p:spPr>
+          <a:xfrm>
+            <a:off x="-845814" y="1043435"/>
+            <a:ext cx="1926655" cy="871060"/>
+          </a:xfrm>
+          <a:prstGeom prst="rect">
+            <a:avLst/>
+          </a:prstGeom>
+          <a:solidFill>
+            <a:srgbClr val="E2AEBF"/>
+          </a:solidFill>
+          <a:ln>
+            <a:solidFill>
+              <a:schemeClr val="tx1">
+                <a:lumMod val="50000"/>
+                <a:lumOff val="50000"/>
+              </a:schemeClr>
+            </a:solidFill>
+          </a:ln>
+        </p:spPr>
+        <p:style>
+          <a:lnRef idx="2">
+            <a:schemeClr val="accent1">
+              <a:shade val="15000"/>
+            </a:schemeClr>
+          </a:lnRef>
+          <a:fillRef idx="1">
+            <a:schemeClr val="accent1"/>
+          </a:fillRef>
+          <a:effectRef idx="0">
+            <a:schemeClr val="accent1"/>
+          </a:effectRef>
+          <a:fontRef idx="minor">
+            <a:schemeClr val="lt1"/>
+          </a:fontRef>
+        </p:style>
+        <p:txBody>
+          <a:bodyPr rtlCol="0" anchor="ctr"/>
+          <a:lstStyle/>
+          <a:p>
+            <a:pPr algn="ctr"/>
+            <a:r>
+              <a:rPr lang="en-US" sz="1600" b="1" dirty="0">
+                <a:solidFill>
+                  <a:schemeClr val="tx1">
+                    <a:lumMod val="75000"/>
+                    <a:lumOff val="25000"/>
+                  </a:schemeClr>
+                </a:solidFill>
+                <a:latin typeface="Arial Black" panose="020B0604020202020204" pitchFamily="34" charset="0"/>
+                <a:cs typeface="Arial Black" panose="020B0604020202020204" pitchFamily="34" charset="0"/>
+              </a:rPr>
+              <a:t>Frog Heart</a:t>
+            </a:r>
+            <a:endParaRPr lang="en-US" sz="1600" i="1" dirty="0">
+              <a:solidFill>
+                <a:schemeClr val="tx1">
+                  <a:lumMod val="75000"/>
+                  <a:lumOff val="25000"/>
+                </a:schemeClr>
+              </a:solidFill>
+              <a:latin typeface="Arial Black" panose="020B0604020202020204" pitchFamily="34" charset="0"/>
+              <a:cs typeface="Arial Black" panose="020B0604020202020204" pitchFamily="34" charset="0"/>
+            </a:endParaRPr>
+          </a:p>
+        </p:txBody>
+      </p:sp>
+      <p:sp>
+        <p:nvSpPr>
+          <p:cNvPr id="14" name="Rectangle 13">
+            <a:extLst>
+              <a:ext uri="{FF2B5EF4-FFF2-40B4-BE49-F238E27FC236}">
+                <a16:creationId xmlns:a16="http://schemas.microsoft.com/office/drawing/2014/main" id="{F6830D21-2708-0243-174D-DE4EBCE38FD9}"/>
+              </a:ext>
+            </a:extLst>
+          </p:cNvPr>
+          <p:cNvSpPr/>
+          <p:nvPr/>
+        </p:nvSpPr>
+        <p:spPr>
+          <a:xfrm>
+            <a:off x="12820031" y="3306073"/>
+            <a:ext cx="1817443" cy="709137"/>
+          </a:xfrm>
+          <a:prstGeom prst="rect">
+            <a:avLst/>
+          </a:prstGeom>
+          <a:solidFill>
+            <a:srgbClr val="B4DAD3"/>
+          </a:solidFill>
+          <a:ln>
+            <a:solidFill>
+              <a:schemeClr val="tx1">
+                <a:lumMod val="50000"/>
+                <a:lumOff val="50000"/>
+              </a:schemeClr>
+            </a:solidFill>
+          </a:ln>
+        </p:spPr>
+        <p:style>
+          <a:lnRef idx="2">
+            <a:schemeClr val="accent1">
+              <a:shade val="15000"/>
+            </a:schemeClr>
+          </a:lnRef>
+          <a:fillRef idx="1">
+            <a:schemeClr val="accent1"/>
+          </a:fillRef>
+          <a:effectRef idx="0">
+            <a:schemeClr val="accent1"/>
+          </a:effectRef>
+          <a:fontRef idx="minor">
+            <a:schemeClr val="lt1"/>
+          </a:fontRef>
+        </p:style>
+        <p:txBody>
+          <a:bodyPr rtlCol="0" anchor="ctr"/>
+          <a:lstStyle/>
+          <a:p>
+            <a:pPr algn="ctr"/>
+            <a:r>
+              <a:rPr lang="en-US" sz="1600" b="1" dirty="0">
+                <a:solidFill>
+                  <a:schemeClr val="tx1">
+                    <a:lumMod val="75000"/>
+                    <a:lumOff val="25000"/>
+                  </a:schemeClr>
+                </a:solidFill>
+                <a:latin typeface="Arial Black" panose="020B0604020202020204" pitchFamily="34" charset="0"/>
+                <a:cs typeface="Arial Black" panose="020B0604020202020204" pitchFamily="34" charset="0"/>
+              </a:rPr>
+              <a:t>OLED Display</a:t>
+            </a:r>
+            <a:endParaRPr lang="en-US" sz="1600" i="1" dirty="0">
+              <a:solidFill>
+                <a:schemeClr val="tx1">
+                  <a:lumMod val="75000"/>
+                  <a:lumOff val="25000"/>
+                </a:schemeClr>
+              </a:solidFill>
+              <a:latin typeface="Arial Black" panose="020B0604020202020204" pitchFamily="34" charset="0"/>
+              <a:cs typeface="Arial Black" panose="020B0604020202020204" pitchFamily="34" charset="0"/>
+            </a:endParaRPr>
+          </a:p>
+        </p:txBody>
+      </p:sp>
+      <p:sp>
+        <p:nvSpPr>
+          <p:cNvPr id="15" name="Rectangle 14">
+            <a:extLst>
+              <a:ext uri="{FF2B5EF4-FFF2-40B4-BE49-F238E27FC236}">
+                <a16:creationId xmlns:a16="http://schemas.microsoft.com/office/drawing/2014/main" id="{C0C56278-352B-C67B-8B77-099FEF3ED37D}"/>
+              </a:ext>
+            </a:extLst>
+          </p:cNvPr>
+          <p:cNvSpPr/>
+          <p:nvPr/>
+        </p:nvSpPr>
+        <p:spPr>
+          <a:xfrm>
+            <a:off x="12820031" y="1123368"/>
+            <a:ext cx="1817443" cy="709137"/>
+          </a:xfrm>
+          <a:prstGeom prst="rect">
+            <a:avLst/>
+          </a:prstGeom>
+          <a:solidFill>
+            <a:srgbClr val="B4DAD3"/>
+          </a:solidFill>
+          <a:ln>
+            <a:solidFill>
+              <a:schemeClr val="tx1">
+                <a:lumMod val="50000"/>
+                <a:lumOff val="50000"/>
+              </a:schemeClr>
+            </a:solidFill>
+          </a:ln>
+        </p:spPr>
+        <p:style>
+          <a:lnRef idx="2">
+            <a:schemeClr val="accent1">
+              <a:shade val="15000"/>
+            </a:schemeClr>
+          </a:lnRef>
+          <a:fillRef idx="1">
+            <a:schemeClr val="accent1"/>
+          </a:fillRef>
+          <a:effectRef idx="0">
+            <a:schemeClr val="accent1"/>
+          </a:effectRef>
+          <a:fontRef idx="minor">
+            <a:schemeClr val="lt1"/>
+          </a:fontRef>
+        </p:style>
+        <p:txBody>
+          <a:bodyPr rtlCol="0" anchor="ctr"/>
+          <a:lstStyle/>
+          <a:p>
+            <a:pPr algn="ctr"/>
+            <a:r>
+              <a:rPr lang="en-US" sz="1600" b="1" dirty="0">
+                <a:solidFill>
+                  <a:schemeClr val="tx1">
+                    <a:lumMod val="75000"/>
+                    <a:lumOff val="25000"/>
+                  </a:schemeClr>
+                </a:solidFill>
+                <a:latin typeface="Arial Black" panose="020B0604020202020204" pitchFamily="34" charset="0"/>
+                <a:cs typeface="Arial Black" panose="020B0604020202020204" pitchFamily="34" charset="0"/>
+              </a:rPr>
+              <a:t>Potentiometer</a:t>
+            </a:r>
+            <a:endParaRPr lang="en-US" sz="1600" i="1" dirty="0">
+              <a:solidFill>
+                <a:schemeClr val="tx1">
+                  <a:lumMod val="75000"/>
+                  <a:lumOff val="25000"/>
+                </a:schemeClr>
+              </a:solidFill>
+              <a:latin typeface="Arial Black" panose="020B0604020202020204" pitchFamily="34" charset="0"/>
+              <a:cs typeface="Arial Black" panose="020B0604020202020204" pitchFamily="34" charset="0"/>
+            </a:endParaRPr>
+          </a:p>
+        </p:txBody>
+      </p:sp>
+      <p:sp>
+        <p:nvSpPr>
+          <p:cNvPr id="17" name="Rectangle 16">
+            <a:extLst>
+              <a:ext uri="{FF2B5EF4-FFF2-40B4-BE49-F238E27FC236}">
+                <a16:creationId xmlns:a16="http://schemas.microsoft.com/office/drawing/2014/main" id="{EA736F8C-441C-296D-74EE-1029937C2E05}"/>
+              </a:ext>
+            </a:extLst>
+          </p:cNvPr>
+          <p:cNvSpPr/>
+          <p:nvPr/>
+        </p:nvSpPr>
+        <p:spPr>
+          <a:xfrm>
+            <a:off x="2648674" y="3194831"/>
+            <a:ext cx="2651461" cy="931624"/>
+          </a:xfrm>
+          <a:prstGeom prst="rect">
+            <a:avLst/>
+          </a:prstGeom>
+          <a:solidFill>
+            <a:srgbClr val="E0BE91"/>
+          </a:solidFill>
+          <a:ln>
+            <a:solidFill>
+              <a:schemeClr val="tx1">
+                <a:lumMod val="50000"/>
+                <a:lumOff val="50000"/>
+              </a:schemeClr>
+            </a:solidFill>
+          </a:ln>
+        </p:spPr>
+        <p:style>
+          <a:lnRef idx="2">
+            <a:schemeClr val="accent1">
+              <a:shade val="15000"/>
+            </a:schemeClr>
+          </a:lnRef>
+          <a:fillRef idx="1">
+            <a:schemeClr val="accent1"/>
+          </a:fillRef>
+          <a:effectRef idx="0">
+            <a:schemeClr val="accent1"/>
+          </a:effectRef>
+          <a:fontRef idx="minor">
+            <a:schemeClr val="lt1"/>
+          </a:fontRef>
+        </p:style>
+        <p:txBody>
+          <a:bodyPr rtlCol="0" anchor="ctr"/>
+          <a:lstStyle/>
+          <a:p>
+            <a:pPr algn="ctr"/>
+            <a:r>
+              <a:rPr lang="en-US" sz="1600" dirty="0">
+                <a:solidFill>
+                  <a:schemeClr val="tx1">
+                    <a:lumMod val="75000"/>
+                    <a:lumOff val="25000"/>
+                  </a:schemeClr>
+                </a:solidFill>
+                <a:latin typeface="Arial Black" panose="020B0604020202020204" pitchFamily="34" charset="0"/>
+                <a:cs typeface="Arial Black" panose="020B0604020202020204" pitchFamily="34" charset="0"/>
+              </a:rPr>
+              <a:t>Capacitive Discharge Stimulation Circuit</a:t>
+            </a:r>
+          </a:p>
+        </p:txBody>
+      </p:sp>
+      <p:cxnSp>
+        <p:nvCxnSpPr>
+          <p:cNvPr id="19" name="Straight Arrow Connector 18">
+            <a:extLst>
+              <a:ext uri="{FF2B5EF4-FFF2-40B4-BE49-F238E27FC236}">
+                <a16:creationId xmlns:a16="http://schemas.microsoft.com/office/drawing/2014/main" id="{3D988E79-38BA-3CE0-E3F6-F3B1E30F4572}"/>
+              </a:ext>
+            </a:extLst>
+          </p:cNvPr>
+          <p:cNvCxnSpPr>
+            <a:cxnSpLocks/>
+            <a:stCxn id="13" idx="3"/>
+            <a:endCxn id="4" idx="1"/>
+          </p:cNvCxnSpPr>
+          <p:nvPr/>
+        </p:nvCxnSpPr>
+        <p:spPr>
+          <a:xfrm>
+            <a:off x="1080841" y="1478965"/>
+            <a:ext cx="552207" cy="0"/>
+          </a:xfrm>
+          <a:prstGeom prst="straightConnector1">
+            <a:avLst/>
+          </a:prstGeom>
+          <a:ln w="57150">
+            <a:solidFill>
+              <a:schemeClr val="bg1"/>
+            </a:solidFill>
+            <a:tailEnd type="triangle"/>
+          </a:ln>
+        </p:spPr>
+        <p:style>
+          <a:lnRef idx="2">
+            <a:schemeClr val="dk1"/>
+          </a:lnRef>
+          <a:fillRef idx="0">
+            <a:schemeClr val="dk1"/>
+          </a:fillRef>
+          <a:effectRef idx="1">
+            <a:schemeClr val="dk1"/>
+          </a:effectRef>
+          <a:fontRef idx="minor">
+            <a:schemeClr val="tx1"/>
+          </a:fontRef>
+        </p:style>
+      </p:cxnSp>
+      <p:cxnSp>
+        <p:nvCxnSpPr>
+          <p:cNvPr id="22" name="Straight Arrow Connector 21">
+            <a:extLst>
+              <a:ext uri="{FF2B5EF4-FFF2-40B4-BE49-F238E27FC236}">
+                <a16:creationId xmlns:a16="http://schemas.microsoft.com/office/drawing/2014/main" id="{B17038FB-EF85-9072-C169-F5A972B15672}"/>
+              </a:ext>
+            </a:extLst>
+          </p:cNvPr>
+          <p:cNvCxnSpPr>
+            <a:cxnSpLocks/>
+            <a:stCxn id="4" idx="3"/>
+            <a:endCxn id="6" idx="1"/>
+          </p:cNvCxnSpPr>
+          <p:nvPr/>
+        </p:nvCxnSpPr>
+        <p:spPr>
+          <a:xfrm>
+            <a:off x="3559703" y="1478965"/>
+            <a:ext cx="811883" cy="2678"/>
+          </a:xfrm>
+          <a:prstGeom prst="straightConnector1">
+            <a:avLst/>
+          </a:prstGeom>
+          <a:ln w="57150">
+            <a:solidFill>
+              <a:schemeClr val="bg1"/>
+            </a:solidFill>
+            <a:tailEnd type="triangle"/>
+          </a:ln>
+        </p:spPr>
+        <p:style>
+          <a:lnRef idx="2">
+            <a:schemeClr val="dk1"/>
+          </a:lnRef>
+          <a:fillRef idx="0">
+            <a:schemeClr val="dk1"/>
+          </a:fillRef>
+          <a:effectRef idx="1">
+            <a:schemeClr val="dk1"/>
+          </a:effectRef>
+          <a:fontRef idx="minor">
+            <a:schemeClr val="tx1"/>
+          </a:fontRef>
+        </p:style>
+      </p:cxnSp>
+      <p:cxnSp>
+        <p:nvCxnSpPr>
+          <p:cNvPr id="25" name="Straight Arrow Connector 24">
+            <a:extLst>
+              <a:ext uri="{FF2B5EF4-FFF2-40B4-BE49-F238E27FC236}">
+                <a16:creationId xmlns:a16="http://schemas.microsoft.com/office/drawing/2014/main" id="{034AB013-708C-6329-C80A-A7C2DC03FEC1}"/>
+              </a:ext>
+            </a:extLst>
+          </p:cNvPr>
+          <p:cNvCxnSpPr>
+            <a:cxnSpLocks/>
+            <a:endCxn id="7" idx="1"/>
+          </p:cNvCxnSpPr>
+          <p:nvPr/>
+        </p:nvCxnSpPr>
+        <p:spPr>
+          <a:xfrm>
+            <a:off x="5808132" y="1477935"/>
+            <a:ext cx="457200" cy="3708"/>
+          </a:xfrm>
+          <a:prstGeom prst="straightConnector1">
+            <a:avLst/>
+          </a:prstGeom>
+          <a:ln w="57150">
+            <a:solidFill>
+              <a:schemeClr val="bg1"/>
+            </a:solidFill>
+            <a:tailEnd type="triangle"/>
+          </a:ln>
+        </p:spPr>
+        <p:style>
+          <a:lnRef idx="2">
+            <a:schemeClr val="dk1"/>
+          </a:lnRef>
+          <a:fillRef idx="0">
+            <a:schemeClr val="dk1"/>
+          </a:fillRef>
+          <a:effectRef idx="1">
+            <a:schemeClr val="dk1"/>
+          </a:effectRef>
+          <a:fontRef idx="minor">
+            <a:schemeClr val="tx1"/>
+          </a:fontRef>
+        </p:style>
+      </p:cxnSp>
+      <p:cxnSp>
+        <p:nvCxnSpPr>
+          <p:cNvPr id="29" name="Straight Arrow Connector 28">
+            <a:extLst>
+              <a:ext uri="{FF2B5EF4-FFF2-40B4-BE49-F238E27FC236}">
+                <a16:creationId xmlns:a16="http://schemas.microsoft.com/office/drawing/2014/main" id="{CE4A60BB-E643-2C39-3E34-6DA2A7B30D55}"/>
+              </a:ext>
+            </a:extLst>
+          </p:cNvPr>
+          <p:cNvCxnSpPr>
+            <a:cxnSpLocks/>
+          </p:cNvCxnSpPr>
+          <p:nvPr/>
+        </p:nvCxnSpPr>
+        <p:spPr>
+          <a:xfrm>
+            <a:off x="7713130" y="1477935"/>
+            <a:ext cx="457200" cy="3708"/>
+          </a:xfrm>
+          <a:prstGeom prst="straightConnector1">
+            <a:avLst/>
+          </a:prstGeom>
+          <a:ln w="57150">
+            <a:solidFill>
+              <a:schemeClr val="bg1"/>
+            </a:solidFill>
+            <a:tailEnd type="triangle"/>
+          </a:ln>
+        </p:spPr>
+        <p:style>
+          <a:lnRef idx="2">
+            <a:schemeClr val="dk1"/>
+          </a:lnRef>
+          <a:fillRef idx="0">
+            <a:schemeClr val="dk1"/>
+          </a:fillRef>
+          <a:effectRef idx="1">
+            <a:schemeClr val="dk1"/>
+          </a:effectRef>
+          <a:fontRef idx="minor">
+            <a:schemeClr val="tx1"/>
+          </a:fontRef>
+        </p:style>
+      </p:cxnSp>
+      <p:cxnSp>
+        <p:nvCxnSpPr>
+          <p:cNvPr id="30" name="Straight Arrow Connector 29">
+            <a:extLst>
+              <a:ext uri="{FF2B5EF4-FFF2-40B4-BE49-F238E27FC236}">
+                <a16:creationId xmlns:a16="http://schemas.microsoft.com/office/drawing/2014/main" id="{B750E409-09D8-730F-2134-1C52E5D18A81}"/>
+              </a:ext>
+            </a:extLst>
+          </p:cNvPr>
+          <p:cNvCxnSpPr>
+            <a:cxnSpLocks/>
+          </p:cNvCxnSpPr>
+          <p:nvPr/>
+        </p:nvCxnSpPr>
+        <p:spPr>
+          <a:xfrm>
+            <a:off x="9584372" y="1477935"/>
+            <a:ext cx="457200" cy="3708"/>
+          </a:xfrm>
+          <a:prstGeom prst="straightConnector1">
+            <a:avLst/>
+          </a:prstGeom>
+          <a:ln w="57150">
+            <a:solidFill>
+              <a:schemeClr val="bg1"/>
+            </a:solidFill>
+            <a:tailEnd type="triangle"/>
+          </a:ln>
+        </p:spPr>
+        <p:style>
+          <a:lnRef idx="2">
+            <a:schemeClr val="dk1"/>
+          </a:lnRef>
+          <a:fillRef idx="0">
+            <a:schemeClr val="dk1"/>
+          </a:fillRef>
+          <a:effectRef idx="1">
+            <a:schemeClr val="dk1"/>
+          </a:effectRef>
+          <a:fontRef idx="minor">
+            <a:schemeClr val="tx1"/>
+          </a:fontRef>
+        </p:style>
+      </p:cxnSp>
+      <p:cxnSp>
+        <p:nvCxnSpPr>
+          <p:cNvPr id="33" name="Straight Arrow Connector 32">
+            <a:extLst>
+              <a:ext uri="{FF2B5EF4-FFF2-40B4-BE49-F238E27FC236}">
+                <a16:creationId xmlns:a16="http://schemas.microsoft.com/office/drawing/2014/main" id="{F5D6386A-96F8-2D9E-596C-B02677183211}"/>
+              </a:ext>
+            </a:extLst>
+          </p:cNvPr>
+          <p:cNvCxnSpPr>
+            <a:cxnSpLocks/>
+          </p:cNvCxnSpPr>
+          <p:nvPr/>
+        </p:nvCxnSpPr>
+        <p:spPr>
+          <a:xfrm>
+            <a:off x="8877351" y="1832504"/>
+            <a:ext cx="0" cy="910697"/>
+          </a:xfrm>
+          <a:prstGeom prst="straightConnector1">
+            <a:avLst/>
+          </a:prstGeom>
+          <a:ln w="57150">
+            <a:solidFill>
+              <a:schemeClr val="bg1"/>
+            </a:solidFill>
+            <a:tailEnd type="triangle"/>
+          </a:ln>
+        </p:spPr>
+        <p:style>
+          <a:lnRef idx="2">
+            <a:schemeClr val="dk1"/>
+          </a:lnRef>
+          <a:fillRef idx="0">
+            <a:schemeClr val="dk1"/>
+          </a:fillRef>
+          <a:effectRef idx="1">
+            <a:schemeClr val="dk1"/>
+          </a:effectRef>
+          <a:fontRef idx="minor">
+            <a:schemeClr val="tx1"/>
+          </a:fontRef>
+        </p:style>
+      </p:cxnSp>
+      <p:cxnSp>
+        <p:nvCxnSpPr>
+          <p:cNvPr id="39" name="Straight Arrow Connector 38">
+            <a:extLst>
+              <a:ext uri="{FF2B5EF4-FFF2-40B4-BE49-F238E27FC236}">
+                <a16:creationId xmlns:a16="http://schemas.microsoft.com/office/drawing/2014/main" id="{DE25DBBB-E1C3-B3C1-D716-0F69EB838CBF}"/>
+              </a:ext>
+            </a:extLst>
+          </p:cNvPr>
+          <p:cNvCxnSpPr>
+            <a:cxnSpLocks/>
+          </p:cNvCxnSpPr>
+          <p:nvPr/>
+        </p:nvCxnSpPr>
+        <p:spPr>
+          <a:xfrm>
+            <a:off x="10807751" y="1832504"/>
+            <a:ext cx="0" cy="910697"/>
+          </a:xfrm>
+          <a:prstGeom prst="straightConnector1">
+            <a:avLst/>
+          </a:prstGeom>
+          <a:ln w="57150">
+            <a:solidFill>
+              <a:schemeClr val="bg1"/>
+            </a:solidFill>
+            <a:tailEnd type="triangle"/>
+          </a:ln>
+        </p:spPr>
+        <p:style>
+          <a:lnRef idx="2">
+            <a:schemeClr val="dk1"/>
+          </a:lnRef>
+          <a:fillRef idx="0">
+            <a:schemeClr val="dk1"/>
+          </a:fillRef>
+          <a:effectRef idx="1">
+            <a:schemeClr val="dk1"/>
+          </a:effectRef>
+          <a:fontRef idx="minor">
+            <a:schemeClr val="tx1"/>
+          </a:fontRef>
+        </p:style>
+      </p:cxnSp>
+      <p:sp>
+        <p:nvSpPr>
+          <p:cNvPr id="40" name="TextBox 39">
+            <a:extLst>
+              <a:ext uri="{FF2B5EF4-FFF2-40B4-BE49-F238E27FC236}">
+                <a16:creationId xmlns:a16="http://schemas.microsoft.com/office/drawing/2014/main" id="{2EE50B36-906F-20D4-331F-4CD0ADF1E5AF}"/>
+              </a:ext>
+            </a:extLst>
+          </p:cNvPr>
+          <p:cNvSpPr txBox="1"/>
+          <p:nvPr/>
+        </p:nvSpPr>
+        <p:spPr>
+          <a:xfrm>
+            <a:off x="8568129" y="2763979"/>
+            <a:ext cx="618443" cy="338554"/>
+          </a:xfrm>
+          <a:prstGeom prst="rect">
+            <a:avLst/>
+          </a:prstGeom>
+          <a:noFill/>
+        </p:spPr>
+        <p:txBody>
+          <a:bodyPr wrap="square">
+            <a:spAutoFit/>
+          </a:bodyPr>
+          <a:lstStyle/>
+          <a:p>
+            <a:pPr algn="r"/>
+            <a:r>
+              <a:rPr lang="en-US" sz="1600" dirty="0">
+                <a:latin typeface="Trebuchet MS" panose="020B0703020202090204" pitchFamily="34" charset="0"/>
+              </a:rPr>
+              <a:t>ADC</a:t>
+            </a:r>
+            <a:endParaRPr lang="en-US" sz="1600" i="1" dirty="0">
+              <a:solidFill>
+                <a:schemeClr val="tx1"/>
+              </a:solidFill>
+              <a:latin typeface="Trebuchet MS" panose="020B0703020202090204" pitchFamily="34" charset="0"/>
+            </a:endParaRPr>
+          </a:p>
+        </p:txBody>
+      </p:sp>
+      <p:sp>
+        <p:nvSpPr>
+          <p:cNvPr id="41" name="TextBox 40">
+            <a:extLst>
+              <a:ext uri="{FF2B5EF4-FFF2-40B4-BE49-F238E27FC236}">
+                <a16:creationId xmlns:a16="http://schemas.microsoft.com/office/drawing/2014/main" id="{3A1CCC04-9D4D-1578-C50B-012756943AF3}"/>
+              </a:ext>
+            </a:extLst>
+          </p:cNvPr>
+          <p:cNvSpPr txBox="1"/>
+          <p:nvPr/>
+        </p:nvSpPr>
+        <p:spPr>
+          <a:xfrm>
+            <a:off x="10498529" y="2750779"/>
+            <a:ext cx="618443" cy="338554"/>
+          </a:xfrm>
+          <a:prstGeom prst="rect">
+            <a:avLst/>
+          </a:prstGeom>
+          <a:noFill/>
+        </p:spPr>
+        <p:txBody>
+          <a:bodyPr wrap="square">
+            <a:spAutoFit/>
+          </a:bodyPr>
+          <a:lstStyle/>
+          <a:p>
+            <a:pPr algn="r"/>
+            <a:r>
+              <a:rPr lang="en-US" sz="1600" dirty="0">
+                <a:latin typeface="Trebuchet MS" panose="020B0703020202090204" pitchFamily="34" charset="0"/>
+              </a:rPr>
+              <a:t>ADC</a:t>
+            </a:r>
+            <a:endParaRPr lang="en-US" sz="1600" i="1" dirty="0">
+              <a:solidFill>
+                <a:schemeClr val="tx1"/>
+              </a:solidFill>
+              <a:latin typeface="Trebuchet MS" panose="020B0703020202090204" pitchFamily="34" charset="0"/>
+            </a:endParaRPr>
+          </a:p>
+        </p:txBody>
+      </p:sp>
+      <p:cxnSp>
+        <p:nvCxnSpPr>
+          <p:cNvPr id="42" name="Straight Arrow Connector 41">
+            <a:extLst>
+              <a:ext uri="{FF2B5EF4-FFF2-40B4-BE49-F238E27FC236}">
+                <a16:creationId xmlns:a16="http://schemas.microsoft.com/office/drawing/2014/main" id="{9C37CD10-D512-5A8B-AB67-E520EA2AF4F6}"/>
+              </a:ext>
+            </a:extLst>
+          </p:cNvPr>
+          <p:cNvCxnSpPr>
+            <a:cxnSpLocks/>
+            <a:stCxn id="12" idx="1"/>
+            <a:endCxn id="17" idx="3"/>
+          </p:cNvCxnSpPr>
+          <p:nvPr/>
+        </p:nvCxnSpPr>
+        <p:spPr>
+          <a:xfrm flipH="1" flipV="1">
+            <a:off x="5300135" y="3660643"/>
+            <a:ext cx="1591731" cy="2"/>
+          </a:xfrm>
+          <a:prstGeom prst="straightConnector1">
+            <a:avLst/>
+          </a:prstGeom>
+          <a:ln w="57150">
+            <a:solidFill>
+              <a:schemeClr val="bg1"/>
+            </a:solidFill>
+            <a:tailEnd type="triangle"/>
+          </a:ln>
+        </p:spPr>
+        <p:style>
+          <a:lnRef idx="2">
+            <a:schemeClr val="dk1"/>
+          </a:lnRef>
+          <a:fillRef idx="0">
+            <a:schemeClr val="dk1"/>
+          </a:fillRef>
+          <a:effectRef idx="1">
+            <a:schemeClr val="dk1"/>
+          </a:effectRef>
+          <a:fontRef idx="minor">
+            <a:schemeClr val="tx1"/>
+          </a:fontRef>
+        </p:style>
+      </p:cxnSp>
+      <p:sp>
+        <p:nvSpPr>
+          <p:cNvPr id="45" name="TextBox 44">
+            <a:extLst>
+              <a:ext uri="{FF2B5EF4-FFF2-40B4-BE49-F238E27FC236}">
+                <a16:creationId xmlns:a16="http://schemas.microsoft.com/office/drawing/2014/main" id="{9C73E45E-130D-CEC5-D4C1-D9294ECCBB3A}"/>
+              </a:ext>
+            </a:extLst>
+          </p:cNvPr>
+          <p:cNvSpPr txBox="1"/>
+          <p:nvPr/>
+        </p:nvSpPr>
+        <p:spPr>
+          <a:xfrm>
+            <a:off x="6891866" y="3383710"/>
+            <a:ext cx="894955" cy="584775"/>
+          </a:xfrm>
+          <a:prstGeom prst="rect">
+            <a:avLst/>
+          </a:prstGeom>
+          <a:noFill/>
+        </p:spPr>
+        <p:txBody>
+          <a:bodyPr wrap="square">
+            <a:spAutoFit/>
+          </a:bodyPr>
+          <a:lstStyle/>
+          <a:p>
+            <a:r>
+              <a:rPr lang="en-US" sz="1600" dirty="0">
+                <a:latin typeface="Trebuchet MS" panose="020B0703020202090204" pitchFamily="34" charset="0"/>
+              </a:rPr>
+              <a:t>Digital</a:t>
+            </a:r>
+          </a:p>
+          <a:p>
+            <a:r>
+              <a:rPr lang="en-US" sz="1600" dirty="0">
+                <a:latin typeface="Trebuchet MS" panose="020B0703020202090204" pitchFamily="34" charset="0"/>
+              </a:rPr>
+              <a:t>Out </a:t>
+            </a:r>
+            <a:endParaRPr lang="en-US" sz="1600" i="1" dirty="0">
+              <a:solidFill>
+                <a:schemeClr val="tx1"/>
+              </a:solidFill>
+              <a:latin typeface="Trebuchet MS" panose="020B0703020202090204" pitchFamily="34" charset="0"/>
+            </a:endParaRPr>
+          </a:p>
+        </p:txBody>
+      </p:sp>
+      <p:cxnSp>
+        <p:nvCxnSpPr>
+          <p:cNvPr id="46" name="Straight Arrow Connector 45">
+            <a:extLst>
+              <a:ext uri="{FF2B5EF4-FFF2-40B4-BE49-F238E27FC236}">
+                <a16:creationId xmlns:a16="http://schemas.microsoft.com/office/drawing/2014/main" id="{50312002-B60A-2CB1-6258-EE2518F10DFE}"/>
+              </a:ext>
+            </a:extLst>
+          </p:cNvPr>
+          <p:cNvCxnSpPr>
+            <a:cxnSpLocks/>
+            <a:stCxn id="15" idx="1"/>
+            <a:endCxn id="11" idx="3"/>
+          </p:cNvCxnSpPr>
+          <p:nvPr/>
+        </p:nvCxnSpPr>
+        <p:spPr>
+          <a:xfrm flipH="1">
+            <a:off x="11627624" y="1477937"/>
+            <a:ext cx="1192407" cy="0"/>
+          </a:xfrm>
+          <a:prstGeom prst="straightConnector1">
+            <a:avLst/>
+          </a:prstGeom>
+          <a:ln w="57150">
+            <a:solidFill>
+              <a:schemeClr val="bg1"/>
+            </a:solidFill>
+            <a:tailEnd type="triangle"/>
+          </a:ln>
+        </p:spPr>
+        <p:style>
+          <a:lnRef idx="2">
+            <a:schemeClr val="dk1"/>
+          </a:lnRef>
+          <a:fillRef idx="0">
+            <a:schemeClr val="dk1"/>
+          </a:fillRef>
+          <a:effectRef idx="1">
+            <a:schemeClr val="dk1"/>
+          </a:effectRef>
+          <a:fontRef idx="minor">
+            <a:schemeClr val="tx1"/>
+          </a:fontRef>
+        </p:style>
+      </p:cxnSp>
+      <p:cxnSp>
+        <p:nvCxnSpPr>
+          <p:cNvPr id="49" name="Straight Arrow Connector 48">
+            <a:extLst>
+              <a:ext uri="{FF2B5EF4-FFF2-40B4-BE49-F238E27FC236}">
+                <a16:creationId xmlns:a16="http://schemas.microsoft.com/office/drawing/2014/main" id="{09A20A5E-03B2-A636-5AA7-A1588198B7C8}"/>
+              </a:ext>
+            </a:extLst>
+          </p:cNvPr>
+          <p:cNvCxnSpPr>
+            <a:cxnSpLocks/>
+            <a:stCxn id="53" idx="3"/>
+            <a:endCxn id="14" idx="1"/>
+          </p:cNvCxnSpPr>
+          <p:nvPr/>
+        </p:nvCxnSpPr>
+        <p:spPr>
+          <a:xfrm flipV="1">
+            <a:off x="11627624" y="3660642"/>
+            <a:ext cx="1192407" cy="1"/>
+          </a:xfrm>
+          <a:prstGeom prst="straightConnector1">
+            <a:avLst/>
+          </a:prstGeom>
+          <a:ln w="57150">
+            <a:solidFill>
+              <a:schemeClr val="bg1"/>
+            </a:solidFill>
+            <a:tailEnd type="triangle"/>
+          </a:ln>
+        </p:spPr>
+        <p:style>
+          <a:lnRef idx="2">
+            <a:schemeClr val="dk1"/>
+          </a:lnRef>
+          <a:fillRef idx="0">
+            <a:schemeClr val="dk1"/>
+          </a:fillRef>
+          <a:effectRef idx="1">
+            <a:schemeClr val="dk1"/>
+          </a:effectRef>
+          <a:fontRef idx="minor">
+            <a:schemeClr val="tx1"/>
+          </a:fontRef>
+        </p:style>
+      </p:cxnSp>
+      <p:sp>
+        <p:nvSpPr>
+          <p:cNvPr id="50" name="TextBox 49">
+            <a:extLst>
+              <a:ext uri="{FF2B5EF4-FFF2-40B4-BE49-F238E27FC236}">
+                <a16:creationId xmlns:a16="http://schemas.microsoft.com/office/drawing/2014/main" id="{EE91A0E0-C200-D60A-FD51-0F36A1273AC4}"/>
+              </a:ext>
+            </a:extLst>
+          </p:cNvPr>
+          <p:cNvSpPr txBox="1"/>
+          <p:nvPr/>
+        </p:nvSpPr>
+        <p:spPr>
+          <a:xfrm>
+            <a:off x="11914605" y="3314081"/>
+            <a:ext cx="618444" cy="338554"/>
+          </a:xfrm>
+          <a:prstGeom prst="rect">
+            <a:avLst/>
+          </a:prstGeom>
+          <a:noFill/>
+        </p:spPr>
+        <p:txBody>
+          <a:bodyPr wrap="square">
+            <a:spAutoFit/>
+          </a:bodyPr>
+          <a:lstStyle/>
+          <a:p>
+            <a:pPr algn="ctr"/>
+            <a:r>
+              <a:rPr lang="en-US" sz="1600" dirty="0">
+                <a:solidFill>
+                  <a:schemeClr val="bg1"/>
+                </a:solidFill>
+                <a:latin typeface="Trebuchet MS" panose="020B0703020202090204" pitchFamily="34" charset="0"/>
+              </a:rPr>
+              <a:t>I2C</a:t>
+            </a:r>
+            <a:endParaRPr lang="en-US" sz="1600" i="1" dirty="0">
+              <a:solidFill>
+                <a:schemeClr val="bg1"/>
+              </a:solidFill>
+              <a:latin typeface="Trebuchet MS" panose="020B0703020202090204" pitchFamily="34" charset="0"/>
+            </a:endParaRPr>
+          </a:p>
+        </p:txBody>
+      </p:sp>
+      <p:sp>
+        <p:nvSpPr>
+          <p:cNvPr id="53" name="TextBox 52">
+            <a:extLst>
+              <a:ext uri="{FF2B5EF4-FFF2-40B4-BE49-F238E27FC236}">
+                <a16:creationId xmlns:a16="http://schemas.microsoft.com/office/drawing/2014/main" id="{E0EBAEAC-47B6-9942-7D63-028FB6F27CCC}"/>
+              </a:ext>
+            </a:extLst>
+          </p:cNvPr>
+          <p:cNvSpPr txBox="1"/>
+          <p:nvPr/>
+        </p:nvSpPr>
+        <p:spPr>
+          <a:xfrm>
+            <a:off x="10732669" y="3368255"/>
+            <a:ext cx="894955" cy="584775"/>
+          </a:xfrm>
+          <a:prstGeom prst="rect">
+            <a:avLst/>
+          </a:prstGeom>
+          <a:noFill/>
+        </p:spPr>
+        <p:txBody>
+          <a:bodyPr wrap="square">
+            <a:spAutoFit/>
+          </a:bodyPr>
+          <a:lstStyle/>
+          <a:p>
+            <a:pPr algn="r"/>
+            <a:r>
+              <a:rPr lang="en-US" sz="1600" dirty="0">
+                <a:latin typeface="Trebuchet MS" panose="020B0703020202090204" pitchFamily="34" charset="0"/>
+              </a:rPr>
+              <a:t>Digital</a:t>
+            </a:r>
+          </a:p>
+          <a:p>
+            <a:pPr algn="r"/>
+            <a:r>
+              <a:rPr lang="en-US" sz="1600" dirty="0">
+                <a:latin typeface="Trebuchet MS" panose="020B0703020202090204" pitchFamily="34" charset="0"/>
+              </a:rPr>
+              <a:t>Out </a:t>
+            </a:r>
+            <a:endParaRPr lang="en-US" sz="1600" i="1" dirty="0">
+              <a:solidFill>
+                <a:schemeClr val="tx1"/>
+              </a:solidFill>
+              <a:latin typeface="Trebuchet MS" panose="020B0703020202090204" pitchFamily="34" charset="0"/>
+            </a:endParaRPr>
+          </a:p>
+        </p:txBody>
+      </p:sp>
+      <p:cxnSp>
+        <p:nvCxnSpPr>
+          <p:cNvPr id="56" name="Straight Connector 55">
+            <a:extLst>
+              <a:ext uri="{FF2B5EF4-FFF2-40B4-BE49-F238E27FC236}">
+                <a16:creationId xmlns:a16="http://schemas.microsoft.com/office/drawing/2014/main" id="{293875C6-17E8-7E64-B8AC-B3493E1AB817}"/>
+              </a:ext>
+            </a:extLst>
+          </p:cNvPr>
+          <p:cNvCxnSpPr>
+            <a:cxnSpLocks/>
+            <a:stCxn id="17" idx="1"/>
+          </p:cNvCxnSpPr>
+          <p:nvPr/>
+        </p:nvCxnSpPr>
+        <p:spPr>
+          <a:xfrm flipH="1">
+            <a:off x="90055" y="3660643"/>
+            <a:ext cx="2558619" cy="0"/>
+          </a:xfrm>
+          <a:prstGeom prst="line">
+            <a:avLst/>
+          </a:prstGeom>
+          <a:ln w="57150">
+            <a:solidFill>
+              <a:schemeClr val="bg1"/>
+            </a:solidFill>
+          </a:ln>
+        </p:spPr>
+        <p:style>
+          <a:lnRef idx="2">
+            <a:schemeClr val="dk1"/>
+          </a:lnRef>
+          <a:fillRef idx="0">
+            <a:schemeClr val="dk1"/>
+          </a:fillRef>
+          <a:effectRef idx="1">
+            <a:schemeClr val="dk1"/>
+          </a:effectRef>
+          <a:fontRef idx="minor">
+            <a:schemeClr val="tx1"/>
+          </a:fontRef>
+        </p:style>
+      </p:cxnSp>
+      <p:cxnSp>
+        <p:nvCxnSpPr>
+          <p:cNvPr id="57" name="Straight Arrow Connector 56">
+            <a:extLst>
+              <a:ext uri="{FF2B5EF4-FFF2-40B4-BE49-F238E27FC236}">
+                <a16:creationId xmlns:a16="http://schemas.microsoft.com/office/drawing/2014/main" id="{F52E0663-A8C9-AF6A-7650-C479F7DF0271}"/>
+              </a:ext>
+            </a:extLst>
+          </p:cNvPr>
+          <p:cNvCxnSpPr>
+            <a:cxnSpLocks/>
+            <a:endCxn id="13" idx="2"/>
+          </p:cNvCxnSpPr>
+          <p:nvPr/>
+        </p:nvCxnSpPr>
+        <p:spPr>
+          <a:xfrm flipV="1">
+            <a:off x="117514" y="1914495"/>
+            <a:ext cx="0" cy="1746147"/>
+          </a:xfrm>
+          <a:prstGeom prst="straightConnector1">
+            <a:avLst/>
+          </a:prstGeom>
+          <a:ln w="57150">
+            <a:solidFill>
+              <a:schemeClr val="bg1"/>
+            </a:solidFill>
+            <a:tailEnd type="triangle"/>
+          </a:ln>
+        </p:spPr>
+        <p:style>
+          <a:lnRef idx="2">
+            <a:schemeClr val="dk1"/>
+          </a:lnRef>
+          <a:fillRef idx="0">
+            <a:schemeClr val="dk1"/>
+          </a:fillRef>
+          <a:effectRef idx="1">
+            <a:schemeClr val="dk1"/>
+          </a:effectRef>
+          <a:fontRef idx="minor">
+            <a:schemeClr val="tx1"/>
+          </a:fontRef>
+        </p:style>
+      </p:cxnSp>
+      <p:sp>
+        <p:nvSpPr>
+          <p:cNvPr id="67" name="TextBox 66">
+            <a:extLst>
+              <a:ext uri="{FF2B5EF4-FFF2-40B4-BE49-F238E27FC236}">
+                <a16:creationId xmlns:a16="http://schemas.microsoft.com/office/drawing/2014/main" id="{DBCD65FB-5F01-5117-72B9-69BF554D53EE}"/>
+              </a:ext>
+            </a:extLst>
+          </p:cNvPr>
+          <p:cNvSpPr txBox="1"/>
+          <p:nvPr/>
+        </p:nvSpPr>
+        <p:spPr>
+          <a:xfrm>
+            <a:off x="10829745" y="2065665"/>
+            <a:ext cx="1786845" cy="338554"/>
+          </a:xfrm>
+          <a:prstGeom prst="rect">
+            <a:avLst/>
+          </a:prstGeom>
+          <a:noFill/>
+        </p:spPr>
+        <p:txBody>
+          <a:bodyPr wrap="square">
+            <a:spAutoFit/>
+          </a:bodyPr>
+          <a:lstStyle/>
+          <a:p>
+            <a:r>
+              <a:rPr lang="en-US" sz="1600" dirty="0">
+                <a:solidFill>
+                  <a:schemeClr val="bg1"/>
+                </a:solidFill>
+                <a:latin typeface="Trebuchet MS" panose="020B0703020202090204" pitchFamily="34" charset="0"/>
+              </a:rPr>
+              <a:t>QRS Detection</a:t>
+            </a:r>
+            <a:endParaRPr lang="en-US" sz="1600" i="1" dirty="0">
+              <a:solidFill>
+                <a:schemeClr val="bg1"/>
+              </a:solidFill>
+              <a:latin typeface="Trebuchet MS" panose="020B0703020202090204" pitchFamily="34" charset="0"/>
+            </a:endParaRPr>
+          </a:p>
+        </p:txBody>
+      </p:sp>
+      <p:sp>
+        <p:nvSpPr>
+          <p:cNvPr id="68" name="TextBox 67">
+            <a:extLst>
+              <a:ext uri="{FF2B5EF4-FFF2-40B4-BE49-F238E27FC236}">
+                <a16:creationId xmlns:a16="http://schemas.microsoft.com/office/drawing/2014/main" id="{10419D2F-E22D-D38D-EF44-F395099FD190}"/>
+              </a:ext>
+            </a:extLst>
+          </p:cNvPr>
+          <p:cNvSpPr txBox="1"/>
+          <p:nvPr/>
+        </p:nvSpPr>
+        <p:spPr>
+          <a:xfrm>
+            <a:off x="7078148" y="2065665"/>
+            <a:ext cx="1786845" cy="338554"/>
+          </a:xfrm>
+          <a:prstGeom prst="rect">
+            <a:avLst/>
+          </a:prstGeom>
+          <a:noFill/>
+        </p:spPr>
+        <p:txBody>
+          <a:bodyPr wrap="square">
+            <a:spAutoFit/>
+          </a:bodyPr>
+          <a:lstStyle/>
+          <a:p>
+            <a:pPr algn="r"/>
+            <a:r>
+              <a:rPr lang="en-US" sz="1600" dirty="0">
+                <a:solidFill>
+                  <a:schemeClr val="bg1"/>
+                </a:solidFill>
+                <a:latin typeface="Trebuchet MS" panose="020B0703020202090204" pitchFamily="34" charset="0"/>
+              </a:rPr>
+              <a:t>Conditioned EGM</a:t>
+            </a:r>
+          </a:p>
+        </p:txBody>
+      </p:sp>
+      <p:sp>
+        <p:nvSpPr>
+          <p:cNvPr id="69" name="TextBox 68">
+            <a:extLst>
+              <a:ext uri="{FF2B5EF4-FFF2-40B4-BE49-F238E27FC236}">
+                <a16:creationId xmlns:a16="http://schemas.microsoft.com/office/drawing/2014/main" id="{92E4E6BA-A07A-53AC-5196-7140561F9771}"/>
+              </a:ext>
+            </a:extLst>
+          </p:cNvPr>
+          <p:cNvSpPr txBox="1"/>
+          <p:nvPr/>
+        </p:nvSpPr>
+        <p:spPr>
+          <a:xfrm>
+            <a:off x="11714068" y="863415"/>
+            <a:ext cx="1192407" cy="584775"/>
+          </a:xfrm>
+          <a:prstGeom prst="rect">
+            <a:avLst/>
+          </a:prstGeom>
+          <a:noFill/>
+        </p:spPr>
+        <p:txBody>
+          <a:bodyPr wrap="square">
+            <a:spAutoFit/>
+          </a:bodyPr>
+          <a:lstStyle/>
+          <a:p>
+            <a:r>
+              <a:rPr lang="en-US" sz="1600" dirty="0">
+                <a:solidFill>
+                  <a:schemeClr val="bg1"/>
+                </a:solidFill>
+                <a:latin typeface="Trebuchet MS" panose="020B0703020202090204" pitchFamily="34" charset="0"/>
+              </a:rPr>
+              <a:t>Detection</a:t>
+            </a:r>
+          </a:p>
+          <a:p>
+            <a:r>
+              <a:rPr lang="en-US" sz="1600" dirty="0">
+                <a:solidFill>
+                  <a:schemeClr val="bg1"/>
+                </a:solidFill>
+                <a:latin typeface="Trebuchet MS" panose="020B0703020202090204" pitchFamily="34" charset="0"/>
+              </a:rPr>
+              <a:t>Threshold</a:t>
+            </a:r>
+          </a:p>
+        </p:txBody>
+      </p:sp>
+      <p:sp>
+        <p:nvSpPr>
+          <p:cNvPr id="74" name="TextBox 73">
+            <a:extLst>
+              <a:ext uri="{FF2B5EF4-FFF2-40B4-BE49-F238E27FC236}">
+                <a16:creationId xmlns:a16="http://schemas.microsoft.com/office/drawing/2014/main" id="{76664C77-9C6E-0CAF-B9F4-58FF0DFC422C}"/>
+              </a:ext>
+            </a:extLst>
+          </p:cNvPr>
+          <p:cNvSpPr txBox="1"/>
+          <p:nvPr/>
+        </p:nvSpPr>
+        <p:spPr>
+          <a:xfrm>
+            <a:off x="3489590" y="878115"/>
+            <a:ext cx="811884" cy="584775"/>
+          </a:xfrm>
+          <a:prstGeom prst="rect">
+            <a:avLst/>
+          </a:prstGeom>
+          <a:noFill/>
+        </p:spPr>
+        <p:txBody>
+          <a:bodyPr wrap="square">
+            <a:spAutoFit/>
+          </a:bodyPr>
+          <a:lstStyle/>
+          <a:p>
+            <a:pPr algn="ctr"/>
+            <a:r>
+              <a:rPr lang="en-US" sz="1600" dirty="0">
+                <a:solidFill>
+                  <a:schemeClr val="bg1"/>
+                </a:solidFill>
+                <a:latin typeface="Trebuchet MS" panose="020B0703020202090204" pitchFamily="34" charset="0"/>
+              </a:rPr>
+              <a:t>Raw EGM</a:t>
+            </a:r>
+          </a:p>
+        </p:txBody>
+      </p:sp>
+      <p:sp>
+        <p:nvSpPr>
+          <p:cNvPr id="2" name="Rectangle 1">
+            <a:extLst>
+              <a:ext uri="{FF2B5EF4-FFF2-40B4-BE49-F238E27FC236}">
+                <a16:creationId xmlns:a16="http://schemas.microsoft.com/office/drawing/2014/main" id="{D1E10CA9-B975-4E2F-0C73-3B1AD95088B4}"/>
+              </a:ext>
+            </a:extLst>
+          </p:cNvPr>
+          <p:cNvSpPr>
+            <a:spLocks noChangeAspect="1"/>
+          </p:cNvSpPr>
+          <p:nvPr/>
+        </p:nvSpPr>
+        <p:spPr>
+          <a:xfrm>
+            <a:off x="-1481938" y="-811787"/>
+            <a:ext cx="16747607" cy="6432011"/>
+          </a:xfrm>
+          <a:prstGeom prst="rect">
+            <a:avLst/>
+          </a:prstGeom>
+          <a:noFill/>
+          <a:ln>
+            <a:noFill/>
+          </a:ln>
+        </p:spPr>
+        <p:style>
+          <a:lnRef idx="2">
+            <a:schemeClr val="accent1">
+              <a:shade val="15000"/>
+            </a:schemeClr>
+          </a:lnRef>
+          <a:fillRef idx="1">
+            <a:schemeClr val="accent1"/>
+          </a:fillRef>
+          <a:effectRef idx="0">
+            <a:schemeClr val="accent1"/>
+          </a:effectRef>
+          <a:fontRef idx="minor">
+            <a:schemeClr val="lt1"/>
+          </a:fontRef>
+        </p:style>
+        <p:txBody>
+          <a:bodyPr rtlCol="0" anchor="ctr"/>
+          <a:lstStyle/>
+          <a:p>
+            <a:pPr algn="ctr"/>
+            <a:endParaRPr lang="en-US" dirty="0"/>
+          </a:p>
+        </p:txBody>
+      </p:sp>
     </p:spTree>
     <p:extLst>
       <p:ext uri="{BB962C8B-B14F-4D97-AF65-F5344CB8AC3E}">
-        <p14:creationId xmlns:p14="http://schemas.microsoft.com/office/powerpoint/2010/main" val="4071890027"/>
+        <p14:creationId xmlns:p14="http://schemas.microsoft.com/office/powerpoint/2010/main" val="2858867688"/>
       </p:ext>
     </p:extLst>
   </p:cSld>
@@ -5695,49 +7519,12 @@
           <a:chExt cx="0" cy="0"/>
         </a:xfrm>
       </p:grpSpPr>
-      <p:pic>
-        <p:nvPicPr>
-          <p:cNvPr id="5" name="Graphic 4">
-            <a:extLst>
-              <a:ext uri="{FF2B5EF4-FFF2-40B4-BE49-F238E27FC236}">
-                <a16:creationId xmlns:a16="http://schemas.microsoft.com/office/drawing/2014/main" id="{FDC55C4C-FA3F-34F1-D40F-6482F5649E50}"/>
-              </a:ext>
-            </a:extLst>
-          </p:cNvPr>
-          <p:cNvPicPr>
-            <a:picLocks noChangeAspect="1"/>
-          </p:cNvPicPr>
-          <p:nvPr/>
-        </p:nvPicPr>
-        <p:blipFill>
-          <a:blip>
-            <a:extLst>
-              <a:ext uri="{96DAC541-7B7A-43D3-8B79-37D633B846F1}">
-                <asvg:svgBlip xmlns:asvg="http://schemas.microsoft.com/office/drawing/2016/SVG/main" r:embed="rId2"/>
-              </a:ext>
-            </a:extLst>
-          </a:blip>
-          <a:srcRect l="15908" t="55999" r="49154" b="25022"/>
-          <a:stretch>
-            <a:fillRect/>
-          </a:stretch>
-        </p:blipFill>
-        <p:spPr>
-          <a:xfrm>
-            <a:off x="1290061" y="901246"/>
-            <a:ext cx="9611877" cy="3689612"/>
-          </a:xfrm>
-          <a:prstGeom prst="rect">
-            <a:avLst/>
-          </a:prstGeom>
-        </p:spPr>
-      </p:pic>
-      <p:sp>
-        <p:nvSpPr>
-          <p:cNvPr id="6" name="Rectangle 5">
-            <a:extLst>
-              <a:ext uri="{FF2B5EF4-FFF2-40B4-BE49-F238E27FC236}">
-                <a16:creationId xmlns:a16="http://schemas.microsoft.com/office/drawing/2014/main" id="{6DEEE686-3652-1160-CFF3-556F2E757573}"/>
+      <p:sp>
+        <p:nvSpPr>
+          <p:cNvPr id="8" name="Rectangle 7">
+            <a:extLst>
+              <a:ext uri="{FF2B5EF4-FFF2-40B4-BE49-F238E27FC236}">
+                <a16:creationId xmlns:a16="http://schemas.microsoft.com/office/drawing/2014/main" id="{94443883-7FCD-FA23-D7B0-EA3AFACE1C6A}"/>
               </a:ext>
             </a:extLst>
           </p:cNvPr>
@@ -5748,15 +7535,17 @@
         </p:nvSpPr>
         <p:spPr>
           <a:xfrm>
-            <a:off x="756742" y="362606"/>
-            <a:ext cx="10696763" cy="6016929"/>
+            <a:off x="756742" y="691977"/>
+            <a:ext cx="10696763" cy="4108151"/>
           </a:xfrm>
           <a:prstGeom prst="rect">
             <a:avLst/>
           </a:prstGeom>
           <a:noFill/>
           <a:ln>
-            <a:noFill/>
+            <a:solidFill>
+              <a:schemeClr val="tx1"/>
+            </a:solidFill>
           </a:ln>
         </p:spPr>
         <p:style>
@@ -5784,64 +7573,47 @@
           </a:p>
         </p:txBody>
       </p:sp>
-      <p:sp>
-        <p:nvSpPr>
-          <p:cNvPr id="7" name="Rectangle 6">
-            <a:extLst>
-              <a:ext uri="{FF2B5EF4-FFF2-40B4-BE49-F238E27FC236}">
-                <a16:creationId xmlns:a16="http://schemas.microsoft.com/office/drawing/2014/main" id="{246DC0BE-7E9A-6C7F-F713-51E6A2FC30BF}"/>
-              </a:ext>
-            </a:extLst>
-          </p:cNvPr>
-          <p:cNvSpPr>
-            <a:spLocks noChangeAspect="1"/>
-          </p:cNvSpPr>
+      <p:pic>
+        <p:nvPicPr>
+          <p:cNvPr id="10" name="Graphic 9">
+            <a:extLst>
+              <a:ext uri="{FF2B5EF4-FFF2-40B4-BE49-F238E27FC236}">
+                <a16:creationId xmlns:a16="http://schemas.microsoft.com/office/drawing/2014/main" id="{2D6AA379-9F7A-0BEC-3BB6-F855FED3454F}"/>
+              </a:ext>
+            </a:extLst>
+          </p:cNvPr>
+          <p:cNvPicPr>
+            <a:picLocks noChangeAspect="1"/>
+          </p:cNvPicPr>
           <p:nvPr/>
-        </p:nvSpPr>
-        <p:spPr>
-          <a:xfrm>
-            <a:off x="756742" y="691977"/>
-            <a:ext cx="10696763" cy="4108151"/>
+        </p:nvPicPr>
+        <p:blipFill>
+          <a:blip>
+            <a:extLst>
+              <a:ext uri="{96DAC541-7B7A-43D3-8B79-37D633B846F1}">
+                <asvg:svgBlip xmlns:asvg="http://schemas.microsoft.com/office/drawing/2016/SVG/main" r:embed="rId2"/>
+              </a:ext>
+            </a:extLst>
+          </a:blip>
+          <a:srcRect l="17069" t="10349" r="20768" b="64903"/>
+          <a:stretch>
+            <a:fillRect/>
+          </a:stretch>
+        </p:blipFill>
+        <p:spPr>
+          <a:xfrm>
+            <a:off x="756742" y="1359242"/>
+            <a:ext cx="10673211" cy="3002693"/>
           </a:xfrm>
           <a:prstGeom prst="rect">
             <a:avLst/>
           </a:prstGeom>
-          <a:noFill/>
-          <a:ln>
-            <a:solidFill>
-              <a:schemeClr val="tx1"/>
-            </a:solidFill>
-          </a:ln>
-        </p:spPr>
-        <p:style>
-          <a:lnRef idx="2">
-            <a:schemeClr val="accent1">
-              <a:shade val="15000"/>
-            </a:schemeClr>
-          </a:lnRef>
-          <a:fillRef idx="1">
-            <a:schemeClr val="accent1"/>
-          </a:fillRef>
-          <a:effectRef idx="0">
-            <a:schemeClr val="accent1"/>
-          </a:effectRef>
-          <a:fontRef idx="minor">
-            <a:schemeClr val="lt1"/>
-          </a:fontRef>
-        </p:style>
-        <p:txBody>
-          <a:bodyPr rtlCol="0" anchor="ctr"/>
-          <a:lstStyle/>
-          <a:p>
-            <a:pPr algn="ctr"/>
-            <a:endParaRPr lang="en-US" dirty="0"/>
-          </a:p>
-        </p:txBody>
-      </p:sp>
+        </p:spPr>
+      </p:pic>
     </p:spTree>
     <p:extLst>
       <p:ext uri="{BB962C8B-B14F-4D97-AF65-F5344CB8AC3E}">
-        <p14:creationId xmlns:p14="http://schemas.microsoft.com/office/powerpoint/2010/main" val="917461311"/>
+        <p14:creationId xmlns:p14="http://schemas.microsoft.com/office/powerpoint/2010/main" val="4071890027"/>
       </p:ext>
     </p:extLst>
   </p:cSld>
@@ -5868,12 +7640,49 @@
           <a:chExt cx="0" cy="0"/>
         </a:xfrm>
       </p:grpSpPr>
-      <p:sp>
-        <p:nvSpPr>
-          <p:cNvPr id="4" name="Rectangle 3">
-            <a:extLst>
-              <a:ext uri="{FF2B5EF4-FFF2-40B4-BE49-F238E27FC236}">
-                <a16:creationId xmlns:a16="http://schemas.microsoft.com/office/drawing/2014/main" id="{45E9C389-B6FD-41A0-5FF3-4ADFA9F39C0E}"/>
+      <p:pic>
+        <p:nvPicPr>
+          <p:cNvPr id="5" name="Graphic 4">
+            <a:extLst>
+              <a:ext uri="{FF2B5EF4-FFF2-40B4-BE49-F238E27FC236}">
+                <a16:creationId xmlns:a16="http://schemas.microsoft.com/office/drawing/2014/main" id="{FDC55C4C-FA3F-34F1-D40F-6482F5649E50}"/>
+              </a:ext>
+            </a:extLst>
+          </p:cNvPr>
+          <p:cNvPicPr>
+            <a:picLocks noChangeAspect="1"/>
+          </p:cNvPicPr>
+          <p:nvPr/>
+        </p:nvPicPr>
+        <p:blipFill>
+          <a:blip>
+            <a:extLst>
+              <a:ext uri="{96DAC541-7B7A-43D3-8B79-37D633B846F1}">
+                <asvg:svgBlip xmlns:asvg="http://schemas.microsoft.com/office/drawing/2016/SVG/main" r:embed="rId2"/>
+              </a:ext>
+            </a:extLst>
+          </a:blip>
+          <a:srcRect l="15908" t="55999" r="49154" b="25022"/>
+          <a:stretch>
+            <a:fillRect/>
+          </a:stretch>
+        </p:blipFill>
+        <p:spPr>
+          <a:xfrm>
+            <a:off x="1290061" y="901246"/>
+            <a:ext cx="9611877" cy="3689612"/>
+          </a:xfrm>
+          <a:prstGeom prst="rect">
+            <a:avLst/>
+          </a:prstGeom>
+        </p:spPr>
+      </p:pic>
+      <p:sp>
+        <p:nvSpPr>
+          <p:cNvPr id="6" name="Rectangle 5">
+            <a:extLst>
+              <a:ext uri="{FF2B5EF4-FFF2-40B4-BE49-F238E27FC236}">
+                <a16:creationId xmlns:a16="http://schemas.microsoft.com/office/drawing/2014/main" id="{6DEEE686-3652-1160-CFF3-556F2E757573}"/>
               </a:ext>
             </a:extLst>
           </p:cNvPr>
@@ -5884,17 +7693,15 @@
         </p:nvSpPr>
         <p:spPr>
           <a:xfrm>
-            <a:off x="756742" y="691976"/>
-            <a:ext cx="10696763" cy="4962865"/>
+            <a:off x="756742" y="362606"/>
+            <a:ext cx="10696763" cy="6016929"/>
           </a:xfrm>
           <a:prstGeom prst="rect">
             <a:avLst/>
           </a:prstGeom>
           <a:noFill/>
           <a:ln>
-            <a:solidFill>
-              <a:schemeClr val="tx1"/>
-            </a:solidFill>
+            <a:noFill/>
           </a:ln>
         </p:spPr>
         <p:style>
@@ -5922,6 +7729,144 @@
           </a:p>
         </p:txBody>
       </p:sp>
+      <p:sp>
+        <p:nvSpPr>
+          <p:cNvPr id="7" name="Rectangle 6">
+            <a:extLst>
+              <a:ext uri="{FF2B5EF4-FFF2-40B4-BE49-F238E27FC236}">
+                <a16:creationId xmlns:a16="http://schemas.microsoft.com/office/drawing/2014/main" id="{246DC0BE-7E9A-6C7F-F713-51E6A2FC30BF}"/>
+              </a:ext>
+            </a:extLst>
+          </p:cNvPr>
+          <p:cNvSpPr>
+            <a:spLocks noChangeAspect="1"/>
+          </p:cNvSpPr>
+          <p:nvPr/>
+        </p:nvSpPr>
+        <p:spPr>
+          <a:xfrm>
+            <a:off x="756742" y="691977"/>
+            <a:ext cx="10696763" cy="4108151"/>
+          </a:xfrm>
+          <a:prstGeom prst="rect">
+            <a:avLst/>
+          </a:prstGeom>
+          <a:noFill/>
+          <a:ln>
+            <a:solidFill>
+              <a:schemeClr val="tx1"/>
+            </a:solidFill>
+          </a:ln>
+        </p:spPr>
+        <p:style>
+          <a:lnRef idx="2">
+            <a:schemeClr val="accent1">
+              <a:shade val="15000"/>
+            </a:schemeClr>
+          </a:lnRef>
+          <a:fillRef idx="1">
+            <a:schemeClr val="accent1"/>
+          </a:fillRef>
+          <a:effectRef idx="0">
+            <a:schemeClr val="accent1"/>
+          </a:effectRef>
+          <a:fontRef idx="minor">
+            <a:schemeClr val="lt1"/>
+          </a:fontRef>
+        </p:style>
+        <p:txBody>
+          <a:bodyPr rtlCol="0" anchor="ctr"/>
+          <a:lstStyle/>
+          <a:p>
+            <a:pPr algn="ctr"/>
+            <a:endParaRPr lang="en-US" dirty="0"/>
+          </a:p>
+        </p:txBody>
+      </p:sp>
+    </p:spTree>
+    <p:extLst>
+      <p:ext uri="{BB962C8B-B14F-4D97-AF65-F5344CB8AC3E}">
+        <p14:creationId xmlns:p14="http://schemas.microsoft.com/office/powerpoint/2010/main" val="917461311"/>
+      </p:ext>
+    </p:extLst>
+  </p:cSld>
+  <p:clrMapOvr>
+    <a:masterClrMapping/>
+  </p:clrMapOvr>
+</p:sld>
+</file>
+
+<file path=ppt/slides/slide5.xml><?xml version="1.0" encoding="utf-8"?>
+<p:sld xmlns:a="http://schemas.openxmlformats.org/drawingml/2006/main" xmlns:r="http://schemas.openxmlformats.org/officeDocument/2006/relationships" xmlns:p="http://schemas.openxmlformats.org/presentationml/2006/main">
+  <p:cSld>
+    <p:spTree>
+      <p:nvGrpSpPr>
+        <p:cNvPr id="1" name=""/>
+        <p:cNvGrpSpPr/>
+        <p:nvPr/>
+      </p:nvGrpSpPr>
+      <p:grpSpPr>
+        <a:xfrm>
+          <a:off x="0" y="0"/>
+          <a:ext cx="0" cy="0"/>
+          <a:chOff x="0" y="0"/>
+          <a:chExt cx="0" cy="0"/>
+        </a:xfrm>
+      </p:grpSpPr>
+      <p:sp>
+        <p:nvSpPr>
+          <p:cNvPr id="4" name="Rectangle 3">
+            <a:extLst>
+              <a:ext uri="{FF2B5EF4-FFF2-40B4-BE49-F238E27FC236}">
+                <a16:creationId xmlns:a16="http://schemas.microsoft.com/office/drawing/2014/main" id="{45E9C389-B6FD-41A0-5FF3-4ADFA9F39C0E}"/>
+              </a:ext>
+            </a:extLst>
+          </p:cNvPr>
+          <p:cNvSpPr>
+            <a:spLocks noChangeAspect="1"/>
+          </p:cNvSpPr>
+          <p:nvPr/>
+        </p:nvSpPr>
+        <p:spPr>
+          <a:xfrm>
+            <a:off x="756742" y="691976"/>
+            <a:ext cx="10696763" cy="4962865"/>
+          </a:xfrm>
+          <a:prstGeom prst="rect">
+            <a:avLst/>
+          </a:prstGeom>
+          <a:noFill/>
+          <a:ln>
+            <a:solidFill>
+              <a:schemeClr val="tx1"/>
+            </a:solidFill>
+          </a:ln>
+        </p:spPr>
+        <p:style>
+          <a:lnRef idx="2">
+            <a:schemeClr val="accent1">
+              <a:shade val="15000"/>
+            </a:schemeClr>
+          </a:lnRef>
+          <a:fillRef idx="1">
+            <a:schemeClr val="accent1"/>
+          </a:fillRef>
+          <a:effectRef idx="0">
+            <a:schemeClr val="accent1"/>
+          </a:effectRef>
+          <a:fontRef idx="minor">
+            <a:schemeClr val="lt1"/>
+          </a:fontRef>
+        </p:style>
+        <p:txBody>
+          <a:bodyPr rtlCol="0" anchor="ctr"/>
+          <a:lstStyle/>
+          <a:p>
+            <a:pPr algn="ctr"/>
+            <a:endParaRPr lang="en-US" dirty="0"/>
+          </a:p>
+        </p:txBody>
+      </p:sp>
       <p:pic>
         <p:nvPicPr>
           <p:cNvPr id="6" name="Picture 5">
@@ -5965,7 +7910,7 @@
 </p:sld>
 </file>
 
-<file path=ppt/slides/slide5.xml><?xml version="1.0" encoding="utf-8"?>
+<file path=ppt/slides/slide6.xml><?xml version="1.0" encoding="utf-8"?>
 <p:sld xmlns:a="http://schemas.openxmlformats.org/drawingml/2006/main" xmlns:r="http://schemas.openxmlformats.org/officeDocument/2006/relationships" xmlns:p="http://schemas.openxmlformats.org/presentationml/2006/main">
   <p:cSld>
     <p:spTree>
@@ -6092,7 +8037,7 @@
 </p:sld>
 </file>
 
-<file path=ppt/slides/slide6.xml><?xml version="1.0" encoding="utf-8"?>
+<file path=ppt/slides/slide7.xml><?xml version="1.0" encoding="utf-8"?>
 <p:sld xmlns:a="http://schemas.openxmlformats.org/drawingml/2006/main" xmlns:r="http://schemas.openxmlformats.org/officeDocument/2006/relationships" xmlns:p="http://schemas.openxmlformats.org/presentationml/2006/main">
   <p:cSld>
     <p:spTree>
@@ -6212,7 +8157,7 @@
 </p:sld>
 </file>
 
-<file path=ppt/slides/slide7.xml><?xml version="1.0" encoding="utf-8"?>
+<file path=ppt/slides/slide8.xml><?xml version="1.0" encoding="utf-8"?>
 <p:sld xmlns:a="http://schemas.openxmlformats.org/drawingml/2006/main" xmlns:r="http://schemas.openxmlformats.org/officeDocument/2006/relationships" xmlns:p="http://schemas.openxmlformats.org/presentationml/2006/main">
   <p:cSld>
     <p:spTree>
